--- a/Fraud_Detection_Project.pptx
+++ b/Fraud_Detection_Project.pptx
@@ -1080,6 +1080,111 @@
           </c:spPr>
           <c:invertIfNegative val="0"/>
           <c:dLbls>
+            <c:dLbl>
+              <c:idx val="0"/>
+              <c:layout/>
+              <c:tx>
+                <c:rich>
+                  <a:bodyPr rot="0" spcFirstLastPara="0" vertOverflow="ellipsis" vert="horz" wrap="square" lIns="38100" tIns="19050" rIns="38100" bIns="19050" anchor="ctr" anchorCtr="1"/>
+                  <a:lstStyle/>
+                  <a:p>
+                    <a:pPr defTabSz="914400">
+                      <a:defRPr lang="en-US" sz="900" b="0" i="0" u="none" strike="noStrike" kern="1200" baseline="0">
+                        <a:solidFill>
+                          <a:srgbClr val="1B1F3B"/>
+                        </a:solidFill>
+                        <a:latin typeface="Arial" panose="020B0604020202020204"/>
+                        <a:ea typeface="+mn-ea"/>
+                        <a:cs typeface="+mn-cs"/>
+                      </a:defRPr>
+                    </a:pPr>
+                    <a:r>
+                      <a:t>0.90.</a:t>
+                    </a:r>
+                  </a:p>
+                </c:rich>
+              </c:tx>
+              <c:dLblPos val="outEnd"/>
+              <c:showLegendKey val="0"/>
+              <c:showVal val="1"/>
+              <c:showCatName val="0"/>
+              <c:showSerName val="0"/>
+              <c:showPercent val="0"/>
+              <c:showBubbleSize val="0"/>
+              <c:extLst>
+                <c:ext xmlns:c15="http://schemas.microsoft.com/office/drawing/2012/chart" uri="{CE6537A1-D6FC-4f65-9D91-7224C49458BB}"/>
+              </c:extLst>
+            </c:dLbl>
+            <c:dLbl>
+              <c:idx val="1"/>
+              <c:layout/>
+              <c:tx>
+                <c:rich>
+                  <a:bodyPr rot="0" spcFirstLastPara="0" vertOverflow="ellipsis" vert="horz" wrap="square" lIns="38100" tIns="19050" rIns="38100" bIns="19050" anchor="ctr" anchorCtr="1"/>
+                  <a:lstStyle/>
+                  <a:p>
+                    <a:pPr defTabSz="914400">
+                      <a:defRPr lang="en-US" sz="900" b="0" i="0" u="none" strike="noStrike" kern="1200" baseline="0">
+                        <a:solidFill>
+                          <a:srgbClr val="1B1F3B"/>
+                        </a:solidFill>
+                        <a:latin typeface="Arial" panose="020B0604020202020204"/>
+                        <a:ea typeface="+mn-ea"/>
+                        <a:cs typeface="+mn-cs"/>
+                      </a:defRPr>
+                    </a:pPr>
+                    <a:r>
+                      <a:t>0.89</a:t>
+                    </a:r>
+                  </a:p>
+                </c:rich>
+              </c:tx>
+              <c:dLblPos val="outEnd"/>
+              <c:showLegendKey val="0"/>
+              <c:showVal val="1"/>
+              <c:showCatName val="0"/>
+              <c:showSerName val="0"/>
+              <c:showPercent val="0"/>
+              <c:showBubbleSize val="0"/>
+              <c:extLst>
+                <c:ext xmlns:c15="http://schemas.microsoft.com/office/drawing/2012/chart" uri="{CE6537A1-D6FC-4f65-9D91-7224C49458BB}"/>
+              </c:extLst>
+            </c:dLbl>
+            <c:dLbl>
+              <c:idx val="2"/>
+              <c:layout/>
+              <c:tx>
+                <c:rich>
+                  <a:bodyPr rot="0" spcFirstLastPara="0" vertOverflow="ellipsis" vert="horz" wrap="square" lIns="38100" tIns="19050" rIns="38100" bIns="19050" anchor="ctr" anchorCtr="1"/>
+                  <a:lstStyle/>
+                  <a:p>
+                    <a:pPr defTabSz="914400">
+                      <a:defRPr lang="en-US" sz="900" b="0" i="0" u="none" strike="noStrike" kern="1200" baseline="0">
+                        <a:solidFill>
+                          <a:srgbClr val="1B1F3B"/>
+                        </a:solidFill>
+                        <a:latin typeface="Arial" panose="020B0604020202020204"/>
+                        <a:ea typeface="+mn-ea"/>
+                        <a:cs typeface="+mn-cs"/>
+                      </a:defRPr>
+                    </a:pPr>
+                    <a:r>
+                      <a:t>0.94</a:t>
+                    </a:r>
+                  </a:p>
+                </c:rich>
+              </c:tx>
+              <c:dLblPos val="outEnd"/>
+              <c:showLegendKey val="0"/>
+              <c:showVal val="1"/>
+              <c:showCatName val="0"/>
+              <c:showSerName val="0"/>
+              <c:showPercent val="0"/>
+              <c:showBubbleSize val="0"/>
+              <c:extLst>
+                <c:ext xmlns:c15="http://schemas.microsoft.com/office/drawing/2012/chart" uri="{CE6537A1-D6FC-4f65-9D91-7224C49458BB}"/>
+              </c:extLst>
+            </c:dLbl>
             <c:numFmt formatCode="0.00" sourceLinked="0"/>
             <c:spPr>
               <a:noFill/>
@@ -1144,13 +1249,13 @@
                 <c:formatCode>General</c:formatCode>
                 <c:ptCount val="3"/>
                 <c:pt idx="0">
-                  <c:v>1</c:v>
+                  <c:v>0.9</c:v>
                 </c:pt>
                 <c:pt idx="1">
-                  <c:v>1</c:v>
+                  <c:v>0.89</c:v>
                 </c:pt>
                 <c:pt idx="2">
-                  <c:v>1</c:v>
+                  <c:v>0.94</c:v>
                 </c:pt>
               </c:numCache>
             </c:numRef>
@@ -1177,7 +1282,48 @@
             <a:effectLst/>
           </c:spPr>
           <c:invertIfNegative val="0"/>
+          <c:dPt>
+            <c:idx val="0"/>
+            <c:invertIfNegative val="0"/>
+            <c:bubble3D val="0"/>
+            <c:explosion val="0"/>
+          </c:dPt>
           <c:dLbls>
+            <c:dLbl>
+              <c:idx val="0"/>
+              <c:layout/>
+              <c:tx>
+                <c:rich>
+                  <a:bodyPr rot="0" spcFirstLastPara="0" vertOverflow="ellipsis" vert="horz" wrap="square" lIns="38100" tIns="19050" rIns="38100" bIns="19050" anchor="ctr" anchorCtr="1"/>
+                  <a:lstStyle/>
+                  <a:p>
+                    <a:pPr defTabSz="914400">
+                      <a:defRPr lang="en-US" sz="900" b="0" i="0" u="none" strike="noStrike" kern="1200" baseline="0">
+                        <a:solidFill>
+                          <a:srgbClr val="1B1F3B"/>
+                        </a:solidFill>
+                        <a:latin typeface="Arial" panose="020B0604020202020204"/>
+                        <a:ea typeface="+mn-ea"/>
+                        <a:cs typeface="+mn-cs"/>
+                      </a:defRPr>
+                    </a:pPr>
+                    <a:r>
+                      <a:t>0.36</a:t>
+                    </a:r>
+                  </a:p>
+                </c:rich>
+              </c:tx>
+              <c:dLblPos val="outEnd"/>
+              <c:showLegendKey val="0"/>
+              <c:showVal val="1"/>
+              <c:showCatName val="0"/>
+              <c:showSerName val="0"/>
+              <c:showPercent val="0"/>
+              <c:showBubbleSize val="0"/>
+              <c:extLst>
+                <c:ext xmlns:c15="http://schemas.microsoft.com/office/drawing/2012/chart" uri="{CE6537A1-D6FC-4f65-9D91-7224C49458BB}"/>
+              </c:extLst>
+            </c:dLbl>
             <c:numFmt formatCode="0.00" sourceLinked="0"/>
             <c:spPr>
               <a:noFill/>
@@ -1242,13 +1388,13 @@
                 <c:formatCode>General</c:formatCode>
                 <c:ptCount val="3"/>
                 <c:pt idx="0">
-                  <c:v>0.87</c:v>
+                  <c:v>0.36</c:v>
                 </c:pt>
                 <c:pt idx="1">
-                  <c:v>0.96</c:v>
+                  <c:v>0.98</c:v>
                 </c:pt>
                 <c:pt idx="2">
-                  <c:v>0.96</c:v>
+                  <c:v>0.97</c:v>
                 </c:pt>
               </c:numCache>
             </c:numRef>
@@ -1276,6 +1422,76 @@
           </c:spPr>
           <c:invertIfNegative val="0"/>
           <c:dLbls>
+            <c:dLbl>
+              <c:idx val="0"/>
+              <c:layout/>
+              <c:tx>
+                <c:rich>
+                  <a:bodyPr rot="0" spcFirstLastPara="0" vertOverflow="ellipsis" vert="horz" wrap="square" lIns="38100" tIns="19050" rIns="38100" bIns="19050" anchor="ctr" anchorCtr="1"/>
+                  <a:lstStyle/>
+                  <a:p>
+                    <a:pPr defTabSz="914400">
+                      <a:defRPr lang="en-US" sz="900" b="0" i="0" u="none" strike="noStrike" kern="1200" baseline="0">
+                        <a:solidFill>
+                          <a:srgbClr val="1B1F3B"/>
+                        </a:solidFill>
+                        <a:latin typeface="Arial" panose="020B0604020202020204"/>
+                        <a:ea typeface="+mn-ea"/>
+                        <a:cs typeface="+mn-cs"/>
+                      </a:defRPr>
+                    </a:pPr>
+                    <a:r>
+                      <a:t>0.51</a:t>
+                    </a:r>
+                  </a:p>
+                </c:rich>
+              </c:tx>
+              <c:dLblPos val="outEnd"/>
+              <c:showLegendKey val="0"/>
+              <c:showVal val="1"/>
+              <c:showCatName val="0"/>
+              <c:showSerName val="0"/>
+              <c:showPercent val="0"/>
+              <c:showBubbleSize val="0"/>
+              <c:extLst>
+                <c:ext xmlns:c15="http://schemas.microsoft.com/office/drawing/2012/chart" uri="{CE6537A1-D6FC-4f65-9D91-7224C49458BB}"/>
+              </c:extLst>
+            </c:dLbl>
+            <c:dLbl>
+              <c:idx val="1"/>
+              <c:layout/>
+              <c:tx>
+                <c:rich>
+                  <a:bodyPr rot="0" spcFirstLastPara="0" vertOverflow="ellipsis" vert="horz" wrap="square" lIns="38100" tIns="19050" rIns="38100" bIns="19050" anchor="ctr" anchorCtr="1"/>
+                  <a:lstStyle/>
+                  <a:p>
+                    <a:pPr defTabSz="914400">
+                      <a:defRPr lang="en-US" sz="900" b="0" i="0" u="none" strike="noStrike" kern="1200" baseline="0">
+                        <a:solidFill>
+                          <a:srgbClr val="1B1F3B"/>
+                        </a:solidFill>
+                        <a:latin typeface="Arial" panose="020B0604020202020204"/>
+                        <a:ea typeface="+mn-ea"/>
+                        <a:cs typeface="+mn-cs"/>
+                      </a:defRPr>
+                    </a:pPr>
+                    <a:r>
+                      <a:t>0.93</a:t>
+                    </a:r>
+                  </a:p>
+                </c:rich>
+              </c:tx>
+              <c:dLblPos val="outEnd"/>
+              <c:showLegendKey val="0"/>
+              <c:showVal val="1"/>
+              <c:showCatName val="0"/>
+              <c:showSerName val="0"/>
+              <c:showPercent val="0"/>
+              <c:showBubbleSize val="0"/>
+              <c:extLst>
+                <c:ext xmlns:c15="http://schemas.microsoft.com/office/drawing/2012/chart" uri="{CE6537A1-D6FC-4f65-9D91-7224C49458BB}"/>
+              </c:extLst>
+            </c:dLbl>
             <c:numFmt formatCode="0.00" sourceLinked="0"/>
             <c:spPr>
               <a:noFill/>
@@ -1340,13 +1556,13 @@
                 <c:formatCode>General</c:formatCode>
                 <c:ptCount val="3"/>
                 <c:pt idx="0">
+                  <c:v>0.51</c:v>
+                </c:pt>
+                <c:pt idx="1">
                   <c:v>0.93</c:v>
                 </c:pt>
-                <c:pt idx="1">
-                  <c:v>0.98</c:v>
-                </c:pt>
                 <c:pt idx="2">
-                  <c:v>0.98</c:v>
+                  <c:v>0.96</c:v>
                 </c:pt>
               </c:numCache>
             </c:numRef>
@@ -1360,8 +1576,8 @@
           <c:showPercent val="0"/>
           <c:showBubbleSize val="0"/>
         </c:dLbls>
-        <c:gapWidth val="35"/>
-        <c:overlap val="0"/>
+        <c:gapWidth val="43"/>
+        <c:overlap val="1"/>
         <c:axId val="2094734554"/>
         <c:axId val="2094734552"/>
       </c:barChart>
@@ -1375,7 +1591,7 @@
         <c:numFmt formatCode="General" sourceLinked="1"/>
         <c:majorTickMark val="out"/>
         <c:minorTickMark val="none"/>
-        <c:tickLblPos val="low"/>
+        <c:tickLblPos val="nextTo"/>
         <c:spPr>
           <a:ln w="12700" cap="flat" cmpd="sng" algn="ctr">
             <a:solidFill>
@@ -3806,7 +4022,7 @@
         </p:nvGraphicFramePr>
         <p:xfrm>
           <a:off x="548640" y="1600200"/>
-          <a:ext cx="7040880" cy="4480560"/>
+          <a:ext cx="7040880" cy="4297680"/>
         </p:xfrm>
         <a:graphic>
           <a:graphicData uri="http://schemas.openxmlformats.org/drawingml/2006/chart">
@@ -3834,6 +4050,12 @@
             <a:srgbClr val="1E2761"/>
           </a:solidFill>
         </p:spPr>
+        <p:txBody>
+          <a:bodyPr/>
+          <a:p>
+            <a:endParaRPr lang="en-US"/>
+          </a:p>
+        </p:txBody>
       </p:sp>
       <p:sp>
         <p:nvSpPr>
@@ -3875,70 +4097,33 @@
       </p:sp>
       <p:sp>
         <p:nvSpPr>
-          <p:cNvPr id="7" name="Text 4"/>
-          <p:cNvSpPr/>
-          <p:nvPr/>
-        </p:nvSpPr>
-        <p:spPr>
-          <a:xfrm>
-            <a:off x="8138160" y="2286000"/>
-            <a:ext cx="3200400" cy="640080"/>
-          </a:xfrm>
-          <a:prstGeom prst="rect">
-            <a:avLst/>
-          </a:prstGeom>
-          <a:noFill/>
-        </p:spPr>
-        <p:txBody>
-          <a:bodyPr wrap="square" lIns="0" tIns="0" rIns="0" bIns="0" rtlCol="0" anchor="ctr"/>
-          <a:lstStyle/>
-          <a:p>
-            <a:pPr marL="0" indent="0">
-              <a:buNone/>
-            </a:pPr>
-            <a:r>
-              <a:rPr lang="en-US" sz="1800" b="1" dirty="0">
-                <a:solidFill>
-                  <a:srgbClr val="FFFFFF"/>
-                </a:solidFill>
-                <a:latin typeface="Cambria" panose="02040503050406030204" pitchFamily="34" charset="0"/>
-                <a:ea typeface="Cambria" panose="02040503050406030204" pitchFamily="34" charset="-122"/>
-                <a:cs typeface="Cambria" panose="02040503050406030204" pitchFamily="34" charset="-120"/>
-              </a:rPr>
-              <a:t>Random Forest and XGBoost tie</a:t>
-            </a:r>
-            <a:endParaRPr lang="en-US" sz="1800" dirty="0"/>
-          </a:p>
-        </p:txBody>
-      </p:sp>
-      <p:sp>
-        <p:nvSpPr>
           <p:cNvPr id="8" name="Text 5"/>
           <p:cNvSpPr/>
           <p:nvPr/>
         </p:nvSpPr>
         <p:spPr>
           <a:xfrm>
-            <a:off x="8138160" y="2971800"/>
-            <a:ext cx="3200400" cy="1188720"/>
-          </a:xfrm>
-          <a:prstGeom prst="rect">
-            <a:avLst/>
-          </a:prstGeom>
-          <a:noFill/>
-        </p:spPr>
-        <p:txBody>
-          <a:bodyPr wrap="square" lIns="0" tIns="0" rIns="0" bIns="0" rtlCol="0" anchor="ctr"/>
-          <a:lstStyle/>
-          <a:p>
-            <a:pPr marL="0" indent="0">
+            <a:off x="8138160" y="2324735"/>
+            <a:ext cx="3200400" cy="3157220"/>
+          </a:xfrm>
+          <a:prstGeom prst="rect">
+            <a:avLst/>
+          </a:prstGeom>
+          <a:noFill/>
+        </p:spPr>
+        <p:txBody>
+          <a:bodyPr wrap="square" lIns="0" tIns="0" rIns="0" bIns="0" rtlCol="0" anchor="ctr"/>
+          <a:lstStyle/>
+          <a:p>
+            <a:pPr marL="285750" indent="-285750">
               <a:lnSpc>
                 <a:spcPct val="135000"/>
               </a:lnSpc>
-              <a:buNone/>
-            </a:pPr>
-            <a:r>
-              <a:rPr lang="en-US" sz="1200" dirty="0">
+              <a:buFont typeface="Wingdings" panose="05000000000000000000" charset="0"/>
+              <a:buChar char="Ø"/>
+            </a:pPr>
+            <a:r>
+              <a:rPr lang="en-US" altLang="en-US" sz="1400" b="1" dirty="0">
                 <a:solidFill>
                   <a:srgbClr val="CADCFC"/>
                 </a:solidFill>
@@ -3946,9 +4131,76 @@
                 <a:ea typeface="Calibri" panose="020F0502020204030204" pitchFamily="34" charset="-122"/>
                 <a:cs typeface="Calibri" panose="020F0502020204030204" pitchFamily="34" charset="-120"/>
               </a:rPr>
-              <a:t>Both reach 0.96 recall and 1.00 precision on fraud — a clear step up from Logistic Regression's 0.87 recall.</a:t>
-            </a:r>
-            <a:endParaRPr lang="en-US" sz="1200" dirty="0"/>
+              <a:t>Highest Fraud Detection: Random Forest captures the most fraud with a top recall of 0.98.</a:t>
+            </a:r>
+            <a:endParaRPr lang="en-US" altLang="en-US" sz="1400" b="1" dirty="0">
+              <a:solidFill>
+                <a:srgbClr val="CADCFC"/>
+              </a:solidFill>
+              <a:latin typeface="Calibri" panose="020F0502020204030204" pitchFamily="34" charset="0"/>
+              <a:ea typeface="Calibri" panose="020F0502020204030204" pitchFamily="34" charset="-122"/>
+              <a:cs typeface="Calibri" panose="020F0502020204030204" pitchFamily="34" charset="-120"/>
+            </a:endParaRPr>
+          </a:p>
+          <a:p>
+            <a:pPr marL="285750" indent="-285750">
+              <a:lnSpc>
+                <a:spcPct val="135000"/>
+              </a:lnSpc>
+              <a:buFont typeface="Wingdings" panose="05000000000000000000" charset="0"/>
+              <a:buChar char="Ø"/>
+            </a:pPr>
+            <a:r>
+              <a:rPr lang="en-US" altLang="en-US" sz="1400" b="1" dirty="0">
+                <a:solidFill>
+                  <a:srgbClr val="CADCFC"/>
+                </a:solidFill>
+                <a:latin typeface="Calibri" panose="020F0502020204030204" pitchFamily="34" charset="0"/>
+                <a:ea typeface="Calibri" panose="020F0502020204030204" pitchFamily="34" charset="-122"/>
+                <a:cs typeface="Calibri" panose="020F0502020204030204" pitchFamily="34" charset="-120"/>
+              </a:rPr>
+              <a:t>Fewer False Alarms: XGBoost delivers better precision (0.94) and a superior F1-score (0.96).</a:t>
+            </a:r>
+            <a:endParaRPr lang="en-US" altLang="en-US" sz="1400" b="1" dirty="0">
+              <a:solidFill>
+                <a:srgbClr val="CADCFC"/>
+              </a:solidFill>
+              <a:latin typeface="Calibri" panose="020F0502020204030204" pitchFamily="34" charset="0"/>
+              <a:ea typeface="Calibri" panose="020F0502020204030204" pitchFamily="34" charset="-122"/>
+              <a:cs typeface="Calibri" panose="020F0502020204030204" pitchFamily="34" charset="-120"/>
+            </a:endParaRPr>
+          </a:p>
+          <a:p>
+            <a:pPr marL="285750" indent="-285750">
+              <a:lnSpc>
+                <a:spcPct val="135000"/>
+              </a:lnSpc>
+              <a:buFont typeface="Wingdings" panose="05000000000000000000" charset="0"/>
+              <a:buChar char="Ø"/>
+            </a:pPr>
+            <a:r>
+              <a:rPr lang="en-US" altLang="en-US" sz="1400" b="1" dirty="0">
+                <a:solidFill>
+                  <a:srgbClr val="CADCFC"/>
+                </a:solidFill>
+                <a:latin typeface="Calibri" panose="020F0502020204030204" pitchFamily="34" charset="0"/>
+                <a:ea typeface="Calibri" panose="020F0502020204030204" pitchFamily="34" charset="-122"/>
+                <a:cs typeface="Calibri" panose="020F0502020204030204" pitchFamily="34" charset="-120"/>
+              </a:rPr>
+              <a:t>.Deployment Choice: Random Forest remains preferred for maximum coverage, while XGBoost is ideal if minimizing false positives is the priority</a:t>
+            </a:r>
+            <a:r>
+              <a:rPr lang="en-US" sz="1400" b="1" dirty="0">
+                <a:solidFill>
+                  <a:srgbClr val="CADCFC"/>
+                </a:solidFill>
+                <a:latin typeface="Calibri" panose="020F0502020204030204" pitchFamily="34" charset="0"/>
+                <a:ea typeface="Calibri" panose="020F0502020204030204" pitchFamily="34" charset="-122"/>
+                <a:cs typeface="Calibri" panose="020F0502020204030204" pitchFamily="34" charset="-120"/>
+              </a:rPr>
+              <a:t>.</a:t>
+            </a:r>
+            <a:endParaRPr lang="en-US" sz="1400" b="1" dirty="0"/>
           </a:p>
         </p:txBody>
       </p:sp>
@@ -3974,47 +4226,6 @@
             <a:prstDash val="solid"/>
           </a:ln>
         </p:spPr>
-      </p:sp>
-      <p:sp>
-        <p:nvSpPr>
-          <p:cNvPr id="10" name="Text 7"/>
-          <p:cNvSpPr/>
-          <p:nvPr/>
-        </p:nvSpPr>
-        <p:spPr>
-          <a:xfrm>
-            <a:off x="8138160" y="4434840"/>
-            <a:ext cx="3200400" cy="1463040"/>
-          </a:xfrm>
-          <a:prstGeom prst="rect">
-            <a:avLst/>
-          </a:prstGeom>
-          <a:noFill/>
-        </p:spPr>
-        <p:txBody>
-          <a:bodyPr wrap="square" lIns="0" tIns="0" rIns="0" bIns="0" rtlCol="0" anchor="ctr"/>
-          <a:lstStyle/>
-          <a:p>
-            <a:pPr marL="0" indent="0">
-              <a:lnSpc>
-                <a:spcPct val="135000"/>
-              </a:lnSpc>
-              <a:buNone/>
-            </a:pPr>
-            <a:r>
-              <a:rPr lang="en-US" sz="1200" i="1" dirty="0">
-                <a:solidFill>
-                  <a:srgbClr val="CADCFC"/>
-                </a:solidFill>
-                <a:latin typeface="Calibri" panose="020F0502020204030204" pitchFamily="34" charset="0"/>
-                <a:ea typeface="Calibri" panose="020F0502020204030204" pitchFamily="34" charset="-122"/>
-                <a:cs typeface="Calibri" panose="020F0502020204030204" pitchFamily="34" charset="-120"/>
-              </a:rPr>
-              <a:t>Random Forest is chosen for deployment — comparable accuracy with a simpler dependency footprint than XGBoost.</a:t>
-            </a:r>
-            <a:endParaRPr lang="en-US" sz="1200" dirty="0"/>
-          </a:p>
-        </p:txBody>
       </p:sp>
       <p:sp>
         <p:nvSpPr>
@@ -4210,7 +4421,7 @@
         <p:spPr>
           <a:xfrm>
             <a:off x="548640" y="1600200"/>
-            <a:ext cx="5394960" cy="4480560"/>
+            <a:ext cx="5394960" cy="4904740"/>
           </a:xfrm>
           <a:prstGeom prst="roundRect">
             <a:avLst>
@@ -4221,6 +4432,12 @@
             <a:srgbClr val="FCEEEC"/>
           </a:solidFill>
         </p:spPr>
+        <p:txBody>
+          <a:bodyPr/>
+          <a:p>
+            <a:endParaRPr lang="en-US"/>
+          </a:p>
+        </p:txBody>
       </p:sp>
       <p:sp>
         <p:nvSpPr>
@@ -4343,19 +4560,151 @@
               </a:lnSpc>
               <a:buNone/>
             </a:pPr>
-            <a:r>
-              <a:rPr lang="en-US" sz="1250" dirty="0">
-                <a:solidFill>
-                  <a:srgbClr val="1B1F3B"/>
+            <a:endParaRPr lang="en-US" sz="1250" dirty="0"/>
+          </a:p>
+        </p:txBody>
+      </p:sp>
+      <p:sp>
+        <p:nvSpPr>
+          <p:cNvPr id="9" name="Shape 7"/>
+          <p:cNvSpPr/>
+          <p:nvPr/>
+        </p:nvSpPr>
+        <p:spPr>
+          <a:xfrm>
+            <a:off x="6200140" y="1600835"/>
+            <a:ext cx="5595620" cy="4903470"/>
+          </a:xfrm>
+          <a:prstGeom prst="roundRect">
+            <a:avLst>
+              <a:gd name="adj" fmla="val 2449"/>
+            </a:avLst>
+          </a:prstGeom>
+          <a:solidFill>
+            <a:srgbClr val="EAF6F0"/>
+          </a:solidFill>
+        </p:spPr>
+        <p:txBody>
+          <a:bodyPr/>
+          <a:p>
+            <a:endParaRPr lang="en-US"/>
+          </a:p>
+        </p:txBody>
+      </p:sp>
+      <p:sp>
+        <p:nvSpPr>
+          <p:cNvPr id="10" name="Shape 8"/>
+          <p:cNvSpPr/>
+          <p:nvPr/>
+        </p:nvSpPr>
+        <p:spPr>
+          <a:xfrm>
+            <a:off x="6560820" y="1851660"/>
+            <a:ext cx="502920" cy="502920"/>
+          </a:xfrm>
+          <a:prstGeom prst="ellipse">
+            <a:avLst/>
+          </a:prstGeom>
+          <a:solidFill>
+            <a:srgbClr val="1E8E5A"/>
+          </a:solidFill>
+        </p:spPr>
+      </p:sp>
+      <p:sp>
+        <p:nvSpPr>
+          <p:cNvPr id="11" name="Text 9"/>
+          <p:cNvSpPr/>
+          <p:nvPr/>
+        </p:nvSpPr>
+        <p:spPr>
+          <a:xfrm>
+            <a:off x="6560820" y="1851660"/>
+            <a:ext cx="502920" cy="502920"/>
+          </a:xfrm>
+          <a:prstGeom prst="rect">
+            <a:avLst/>
+          </a:prstGeom>
+          <a:noFill/>
+        </p:spPr>
+        <p:txBody>
+          <a:bodyPr wrap="square" lIns="0" tIns="0" rIns="0" bIns="0" rtlCol="0" anchor="ctr"/>
+          <a:lstStyle/>
+          <a:p>
+            <a:pPr marL="0" indent="0" algn="ctr">
+              <a:buNone/>
+            </a:pPr>
+            <a:r>
+              <a:rPr lang="en-US" sz="2200" b="1" dirty="0">
+                <a:solidFill>
+                  <a:srgbClr val="FFFFFF"/>
+                </a:solidFill>
+                <a:latin typeface="Arial" panose="020B0604020202020204" pitchFamily="34" charset="0"/>
+                <a:ea typeface="Arial" panose="020B0604020202020204" pitchFamily="34" charset="-122"/>
+                <a:cs typeface="Arial" panose="020B0604020202020204" pitchFamily="34" charset="-120"/>
+              </a:rPr>
+              <a:t>✓</a:t>
+            </a:r>
+            <a:endParaRPr lang="en-US" sz="2200" dirty="0"/>
+          </a:p>
+        </p:txBody>
+      </p:sp>
+      <p:sp>
+        <p:nvSpPr>
+          <p:cNvPr id="12" name="Text 10"/>
+          <p:cNvSpPr/>
+          <p:nvPr/>
+        </p:nvSpPr>
+        <p:spPr>
+          <a:xfrm>
+            <a:off x="7178040" y="1847088"/>
+            <a:ext cx="4114800" cy="502920"/>
+          </a:xfrm>
+          <a:prstGeom prst="rect">
+            <a:avLst/>
+          </a:prstGeom>
+          <a:noFill/>
+        </p:spPr>
+        <p:txBody>
+          <a:bodyPr wrap="square" lIns="0" tIns="0" rIns="0" bIns="0" rtlCol="0" anchor="ctr"/>
+          <a:lstStyle/>
+          <a:p>
+            <a:pPr marL="0" indent="0">
+              <a:buNone/>
+            </a:pPr>
+            <a:r>
+              <a:rPr lang="en-US" sz="1600" b="1" dirty="0">
+                <a:solidFill>
+                  <a:srgbClr val="1E8E5A"/>
                 </a:solidFill>
                 <a:latin typeface="Calibri" panose="020F0502020204030204" pitchFamily="34" charset="0"/>
                 <a:ea typeface="Calibri" panose="020F0502020204030204" pitchFamily="34" charset="-122"/>
                 <a:cs typeface="Calibri" panose="020F0502020204030204" pitchFamily="34" charset="-120"/>
               </a:rPr>
-              <a:t>Engineered features orgin_balance_change and dest_balance_change were derived from post-transaction balances (newbalanceOrig, newbalanceDest).</a:t>
-            </a:r>
-            <a:endParaRPr lang="en-US" sz="1250" dirty="0"/>
-          </a:p>
+              <a:t>The Test &amp; Result</a:t>
+            </a:r>
+            <a:endParaRPr lang="en-US" sz="1600" dirty="0"/>
+          </a:p>
+        </p:txBody>
+      </p:sp>
+      <p:sp>
+        <p:nvSpPr>
+          <p:cNvPr id="13" name="Text 11"/>
+          <p:cNvSpPr/>
+          <p:nvPr/>
+        </p:nvSpPr>
+        <p:spPr>
+          <a:xfrm>
+            <a:off x="6812280" y="2514600"/>
+            <a:ext cx="4572000" cy="1371600"/>
+          </a:xfrm>
+          <a:prstGeom prst="rect">
+            <a:avLst/>
+          </a:prstGeom>
+          <a:noFill/>
+        </p:spPr>
+        <p:txBody>
+          <a:bodyPr wrap="square" lIns="0" tIns="0" rIns="0" bIns="0" rtlCol="0" anchor="ctr"/>
+          <a:lstStyle/>
           <a:p>
             <a:pPr marL="0" indent="0">
               <a:lnSpc>
@@ -4363,6 +4712,30 @@
               </a:lnSpc>
               <a:buNone/>
             </a:pPr>
+            <a:r>
+              <a:rPr lang="en-US" sz="1250" dirty="0">
+                <a:solidFill>
+                  <a:srgbClr val="1B1F3B"/>
+                </a:solidFill>
+                <a:latin typeface="Arial Black" panose="020B0A04020102020204" charset="0"/>
+                <a:ea typeface="Calibri" panose="020F0502020204030204" pitchFamily="34" charset="-122"/>
+                <a:cs typeface="Arial Black" panose="020B0A04020102020204" charset="0"/>
+                <a:sym typeface="+mn-ea"/>
+              </a:rPr>
+              <a:t>Retrained Random Forest three ways: all features, without post-transaction balances, and without balances and step. The final model uses only pre-transaction data</a:t>
+            </a:r>
+            <a:r>
+              <a:rPr lang="en-US" sz="1250" dirty="0">
+                <a:solidFill>
+                  <a:srgbClr val="1B1F3B"/>
+                </a:solidFill>
+                <a:latin typeface="Calibri" panose="020F0502020204030204" pitchFamily="34" charset="0"/>
+                <a:ea typeface="Calibri" panose="020F0502020204030204" pitchFamily="34" charset="-122"/>
+                <a:cs typeface="Calibri" panose="020F0502020204030204" pitchFamily="34" charset="-120"/>
+                <a:sym typeface="+mn-ea"/>
+              </a:rPr>
+              <a:t>.</a:t>
+            </a:r>
             <a:endParaRPr lang="en-US" sz="1250" dirty="0"/>
           </a:p>
           <a:p>
@@ -4372,174 +4745,6 @@
               </a:lnSpc>
               <a:buNone/>
             </a:pPr>
-            <a:r>
-              <a:rPr lang="en-US" sz="1250" dirty="0">
-                <a:solidFill>
-                  <a:srgbClr val="1B1F3B"/>
-                </a:solidFill>
-                <a:latin typeface="Calibri" panose="020F0502020204030204" pitchFamily="34" charset="0"/>
-                <a:ea typeface="Calibri" panose="020F0502020204030204" pitchFamily="34" charset="-122"/>
-                <a:cs typeface="Calibri" panose="020F0502020204030204" pitchFamily="34" charset="-120"/>
-              </a:rPr>
-              <a:t>In this dataset, fraudulent transfers often drain the account completely — so balance_change ≈ amount whenever fraud occurs, effectively handing the model the answer.</a:t>
-            </a:r>
-            <a:endParaRPr lang="en-US" sz="1250" dirty="0"/>
-          </a:p>
-        </p:txBody>
-      </p:sp>
-      <p:sp>
-        <p:nvSpPr>
-          <p:cNvPr id="9" name="Shape 7"/>
-          <p:cNvSpPr/>
-          <p:nvPr/>
-        </p:nvSpPr>
-        <p:spPr>
-          <a:xfrm>
-            <a:off x="6217920" y="1600200"/>
-            <a:ext cx="5394960" cy="4480560"/>
-          </a:xfrm>
-          <a:prstGeom prst="roundRect">
-            <a:avLst>
-              <a:gd name="adj" fmla="val 2449"/>
-            </a:avLst>
-          </a:prstGeom>
-          <a:solidFill>
-            <a:srgbClr val="EAF6F0"/>
-          </a:solidFill>
-        </p:spPr>
-      </p:sp>
-      <p:sp>
-        <p:nvSpPr>
-          <p:cNvPr id="10" name="Shape 8"/>
-          <p:cNvSpPr/>
-          <p:nvPr/>
-        </p:nvSpPr>
-        <p:spPr>
-          <a:xfrm>
-            <a:off x="6560820" y="1851660"/>
-            <a:ext cx="502920" cy="502920"/>
-          </a:xfrm>
-          <a:prstGeom prst="ellipse">
-            <a:avLst/>
-          </a:prstGeom>
-          <a:solidFill>
-            <a:srgbClr val="1E8E5A"/>
-          </a:solidFill>
-        </p:spPr>
-      </p:sp>
-      <p:sp>
-        <p:nvSpPr>
-          <p:cNvPr id="11" name="Text 9"/>
-          <p:cNvSpPr/>
-          <p:nvPr/>
-        </p:nvSpPr>
-        <p:spPr>
-          <a:xfrm>
-            <a:off x="6560820" y="1851660"/>
-            <a:ext cx="502920" cy="502920"/>
-          </a:xfrm>
-          <a:prstGeom prst="rect">
-            <a:avLst/>
-          </a:prstGeom>
-          <a:noFill/>
-        </p:spPr>
-        <p:txBody>
-          <a:bodyPr wrap="square" lIns="0" tIns="0" rIns="0" bIns="0" rtlCol="0" anchor="ctr"/>
-          <a:lstStyle/>
-          <a:p>
-            <a:pPr marL="0" indent="0" algn="ctr">
-              <a:buNone/>
-            </a:pPr>
-            <a:r>
-              <a:rPr lang="en-US" sz="2200" b="1" dirty="0">
-                <a:solidFill>
-                  <a:srgbClr val="FFFFFF"/>
-                </a:solidFill>
-                <a:latin typeface="Arial" panose="020B0604020202020204" pitchFamily="34" charset="0"/>
-                <a:ea typeface="Arial" panose="020B0604020202020204" pitchFamily="34" charset="-122"/>
-                <a:cs typeface="Arial" panose="020B0604020202020204" pitchFamily="34" charset="-120"/>
-              </a:rPr>
-              <a:t>✓</a:t>
-            </a:r>
-            <a:endParaRPr lang="en-US" sz="2200" dirty="0"/>
-          </a:p>
-        </p:txBody>
-      </p:sp>
-      <p:sp>
-        <p:nvSpPr>
-          <p:cNvPr id="12" name="Text 10"/>
-          <p:cNvSpPr/>
-          <p:nvPr/>
-        </p:nvSpPr>
-        <p:spPr>
-          <a:xfrm>
-            <a:off x="7178040" y="1847088"/>
-            <a:ext cx="4114800" cy="502920"/>
-          </a:xfrm>
-          <a:prstGeom prst="rect">
-            <a:avLst/>
-          </a:prstGeom>
-          <a:noFill/>
-        </p:spPr>
-        <p:txBody>
-          <a:bodyPr wrap="square" lIns="0" tIns="0" rIns="0" bIns="0" rtlCol="0" anchor="ctr"/>
-          <a:lstStyle/>
-          <a:p>
-            <a:pPr marL="0" indent="0">
-              <a:buNone/>
-            </a:pPr>
-            <a:r>
-              <a:rPr lang="en-US" sz="1600" b="1" dirty="0">
-                <a:solidFill>
-                  <a:srgbClr val="1E8E5A"/>
-                </a:solidFill>
-                <a:latin typeface="Calibri" panose="020F0502020204030204" pitchFamily="34" charset="0"/>
-                <a:ea typeface="Calibri" panose="020F0502020204030204" pitchFamily="34" charset="-122"/>
-                <a:cs typeface="Calibri" panose="020F0502020204030204" pitchFamily="34" charset="-120"/>
-              </a:rPr>
-              <a:t>The Test &amp; Result</a:t>
-            </a:r>
-            <a:endParaRPr lang="en-US" sz="1600" dirty="0"/>
-          </a:p>
-        </p:txBody>
-      </p:sp>
-      <p:sp>
-        <p:nvSpPr>
-          <p:cNvPr id="13" name="Text 11"/>
-          <p:cNvSpPr/>
-          <p:nvPr/>
-        </p:nvSpPr>
-        <p:spPr>
-          <a:xfrm>
-            <a:off x="6812280" y="2514600"/>
-            <a:ext cx="4572000" cy="1371600"/>
-          </a:xfrm>
-          <a:prstGeom prst="rect">
-            <a:avLst/>
-          </a:prstGeom>
-          <a:noFill/>
-        </p:spPr>
-        <p:txBody>
-          <a:bodyPr wrap="square" lIns="0" tIns="0" rIns="0" bIns="0" rtlCol="0" anchor="ctr"/>
-          <a:lstStyle/>
-          <a:p>
-            <a:pPr marL="0" indent="0">
-              <a:lnSpc>
-                <a:spcPct val="140000"/>
-              </a:lnSpc>
-              <a:buNone/>
-            </a:pPr>
-            <a:r>
-              <a:rPr lang="en-US" sz="1250" dirty="0">
-                <a:solidFill>
-                  <a:srgbClr val="1B1F3B"/>
-                </a:solidFill>
-                <a:latin typeface="Calibri" panose="020F0502020204030204" pitchFamily="34" charset="0"/>
-                <a:ea typeface="Calibri" panose="020F0502020204030204" pitchFamily="34" charset="-122"/>
-                <a:cs typeface="Calibri" panose="020F0502020204030204" pitchFamily="34" charset="-120"/>
-              </a:rPr>
-              <a:t>Retrained Random Forest after removing newbalanceOrig, newbalanceDest, and the two engineered change features — keeping only pre-transaction data.</a:t>
-            </a:r>
             <a:endParaRPr lang="en-US" sz="1250" dirty="0"/>
           </a:p>
         </p:txBody>
@@ -4598,9 +4803,36 @@
                 <a:latin typeface="Calibri" panose="020F0502020204030204" pitchFamily="34" charset="0"/>
                 <a:ea typeface="Calibri" panose="020F0502020204030204" pitchFamily="34" charset="-122"/>
                 <a:cs typeface="Calibri" panose="020F0502020204030204" pitchFamily="34" charset="-120"/>
-              </a:rPr>
-              <a:t>Recall on fraud (class 1): 0.96 → 0.97</a:t>
-            </a:r>
+                <a:sym typeface="+mn-ea"/>
+              </a:rPr>
+              <a:t>Precision 1.00 → 0.90  |  Recall 0.97 → 0.</a:t>
+            </a:r>
+            <a:r>
+              <a:rPr lang="en-US" sz="1350" b="1" dirty="0">
+                <a:solidFill>
+                  <a:srgbClr val="1B1F3B"/>
+                </a:solidFill>
+                <a:latin typeface="Calibri" panose="020F0502020204030204" pitchFamily="34" charset="0"/>
+                <a:ea typeface="Calibri" panose="020F0502020204030204" pitchFamily="34" charset="-122"/>
+                <a:cs typeface="Calibri" panose="020F0502020204030204" pitchFamily="34" charset="-120"/>
+                <a:sym typeface="+mn-ea"/>
+              </a:rPr>
+              <a:t>98</a:t>
+            </a:r>
+            <a:endParaRPr lang="en-US" sz="1350" b="1" dirty="0">
+              <a:solidFill>
+                <a:srgbClr val="1B1F3B"/>
+              </a:solidFill>
+              <a:latin typeface="Calibri" panose="020F0502020204030204" pitchFamily="34" charset="0"/>
+              <a:ea typeface="Calibri" panose="020F0502020204030204" pitchFamily="34" charset="-122"/>
+              <a:cs typeface="Calibri" panose="020F0502020204030204" pitchFamily="34" charset="-120"/>
+              <a:sym typeface="+mn-ea"/>
+            </a:endParaRPr>
+          </a:p>
+          <a:p>
+            <a:pPr marL="0" indent="0">
+              <a:buNone/>
+            </a:pPr>
             <a:endParaRPr lang="en-US" sz="1350" dirty="0"/>
           </a:p>
         </p:txBody>
@@ -4631,17 +4863,6 @@
               </a:lnSpc>
               <a:buNone/>
             </a:pPr>
-            <a:r>
-              <a:rPr lang="en-US" sz="1250" i="1" dirty="0">
-                <a:solidFill>
-                  <a:srgbClr val="1B1F3B"/>
-                </a:solidFill>
-                <a:latin typeface="Calibri" panose="020F0502020204030204" pitchFamily="34" charset="0"/>
-                <a:ea typeface="Calibri" panose="020F0502020204030204" pitchFamily="34" charset="-122"/>
-                <a:cs typeface="Calibri" panose="020F0502020204030204" pitchFamily="34" charset="-120"/>
-              </a:rPr>
-              <a:t>Performance held steady (even improved slightly) — confirming the strong scores reflect genuine, learnable fraud patterns, not leakage.</a:t>
-            </a:r>
             <a:endParaRPr lang="en-US" sz="1250" dirty="0"/>
           </a:p>
         </p:txBody>
@@ -4719,6 +4940,150 @@
               <a:t>12</a:t>
             </a:r>
             <a:endParaRPr lang="en-US" sz="900" dirty="0"/>
+          </a:p>
+        </p:txBody>
+      </p:sp>
+      <p:sp>
+        <p:nvSpPr>
+          <p:cNvPr id="19" name="Text Box 18"/>
+          <p:cNvSpPr txBox="1"/>
+          <p:nvPr/>
+        </p:nvSpPr>
+        <p:spPr>
+          <a:xfrm>
+            <a:off x="708660" y="2354580"/>
+            <a:ext cx="5220335" cy="3702685"/>
+          </a:xfrm>
+          <a:prstGeom prst="rect">
+            <a:avLst/>
+          </a:prstGeom>
+          <a:noFill/>
+        </p:spPr>
+        <p:txBody>
+          <a:bodyPr wrap="square" rtlCol="0">
+            <a:noAutofit/>
+          </a:bodyPr>
+          <a:p>
+            <a:pPr marL="0" indent="0">
+              <a:lnSpc>
+                <a:spcPct val="140000"/>
+              </a:lnSpc>
+              <a:buNone/>
+            </a:pPr>
+            <a:r>
+              <a:rPr lang="en-US" dirty="0">
+                <a:solidFill>
+                  <a:srgbClr val="1B1F3B"/>
+                </a:solidFill>
+                <a:latin typeface="Calibri" panose="020F0502020204030204" pitchFamily="34" charset="0"/>
+                <a:ea typeface="Calibri" panose="020F0502020204030204" pitchFamily="34" charset="-122"/>
+                <a:cs typeface="Calibri" panose="020F0502020204030204" pitchFamily="34" charset="-120"/>
+                <a:sym typeface="+mn-ea"/>
+              </a:rPr>
+              <a:t>1. newbalanceOrig / newbalanceDest are known only after the transaction.</a:t>
+            </a:r>
+            <a:endParaRPr lang="en-US" dirty="0"/>
+          </a:p>
+          <a:p>
+            <a:pPr marL="0" indent="0">
+              <a:lnSpc>
+                <a:spcPct val="140000"/>
+              </a:lnSpc>
+              <a:buNone/>
+            </a:pPr>
+            <a:endParaRPr lang="en-US" dirty="0"/>
+          </a:p>
+          <a:p>
+            <a:pPr marL="0" indent="0">
+              <a:lnSpc>
+                <a:spcPct val="140000"/>
+              </a:lnSpc>
+              <a:buNone/>
+            </a:pPr>
+            <a:r>
+              <a:rPr lang="en-US" dirty="0">
+                <a:solidFill>
+                  <a:srgbClr val="1B1F3B"/>
+                </a:solidFill>
+                <a:latin typeface="Calibri" panose="020F0502020204030204" pitchFamily="34" charset="0"/>
+                <a:ea typeface="Calibri" panose="020F0502020204030204" pitchFamily="34" charset="-122"/>
+                <a:cs typeface="Calibri" panose="020F0502020204030204" pitchFamily="34" charset="-120"/>
+                <a:sym typeface="+mn-ea"/>
+              </a:rPr>
+              <a:t>2. orgin_balance_change / dest_balance_change were built from those balances, so they leak too (fraud drains the account, so change ≈ amount).</a:t>
+            </a:r>
+            <a:endParaRPr lang="en-US" dirty="0"/>
+          </a:p>
+          <a:p>
+            <a:pPr marL="0" indent="0">
+              <a:lnSpc>
+                <a:spcPct val="140000"/>
+              </a:lnSpc>
+              <a:buNone/>
+            </a:pPr>
+            <a:endParaRPr lang="en-US" dirty="0"/>
+          </a:p>
+          <a:p>
+            <a:pPr marL="0" indent="0">
+              <a:lnSpc>
+                <a:spcPct val="140000"/>
+              </a:lnSpc>
+              <a:buNone/>
+            </a:pPr>
+            <a:r>
+              <a:rPr lang="en-US" dirty="0">
+                <a:solidFill>
+                  <a:srgbClr val="1B1F3B"/>
+                </a:solidFill>
+                <a:latin typeface="Calibri" panose="020F0502020204030204" pitchFamily="34" charset="0"/>
+                <a:ea typeface="Calibri" panose="020F0502020204030204" pitchFamily="34" charset="-122"/>
+                <a:cs typeface="Calibri" panose="020F0502020204030204" pitchFamily="34" charset="-120"/>
+                <a:sym typeface="+mn-ea"/>
+              </a:rPr>
+              <a:t>3. step: every transaction after step 7 is fraud. This comes from how the dataset was sampled, not from real fraud behaviour.</a:t>
+            </a:r>
+            <a:endParaRPr lang="en-US" dirty="0"/>
+          </a:p>
+          <a:p>
+            <a:endParaRPr lang="en-US"/>
+          </a:p>
+        </p:txBody>
+      </p:sp>
+      <p:sp>
+        <p:nvSpPr>
+          <p:cNvPr id="20" name="Text Box 19"/>
+          <p:cNvSpPr txBox="1"/>
+          <p:nvPr/>
+        </p:nvSpPr>
+        <p:spPr>
+          <a:xfrm>
+            <a:off x="6308725" y="4728845"/>
+            <a:ext cx="5395595" cy="1585595"/>
+          </a:xfrm>
+          <a:prstGeom prst="rect">
+            <a:avLst/>
+          </a:prstGeom>
+          <a:noFill/>
+        </p:spPr>
+        <p:txBody>
+          <a:bodyPr wrap="square" rtlCol="0">
+            <a:noAutofit/>
+          </a:bodyPr>
+          <a:p>
+            <a:r>
+              <a:rPr lang="en-US" i="1" dirty="0">
+                <a:solidFill>
+                  <a:srgbClr val="1B1F3B"/>
+                </a:solidFill>
+                <a:ea typeface="Calibri" panose="020F0502020204030204" pitchFamily="34" charset="-122"/>
+                <a:cs typeface="+mn-lt"/>
+                <a:sym typeface="+mn-ea"/>
+              </a:rPr>
+              <a:t>Scores dropped slightly, as expected. The final model still catches about 98% of fraud, with about 25 false alarms out of 2,001 normal transactions</a:t>
+            </a:r>
+            <a:endParaRPr lang="en-US">
+              <a:cs typeface="+mn-lt"/>
+            </a:endParaRPr>
           </a:p>
         </p:txBody>
       </p:sp>
@@ -4825,7 +5190,7 @@
                 <a:ea typeface="Calibri" panose="020F0502020204030204" pitchFamily="34" charset="-122"/>
                 <a:cs typeface="Calibri" panose="020F0502020204030204" pitchFamily="34" charset="-120"/>
               </a:rPr>
-              <a:t>Tied with XGBoost on performance — chosen on practicality and validated stability</a:t>
+              <a:t>chosen on practicality and validated stability</a:t>
             </a:r>
             <a:endParaRPr lang="en-US" sz="1300" dirty="0"/>
           </a:p>
@@ -5882,588 +6247,6 @@
       </p:sp>
       <p:sp>
         <p:nvSpPr>
-          <p:cNvPr id="36" name="Text 34"/>
-          <p:cNvSpPr/>
-          <p:nvPr/>
-        </p:nvSpPr>
-        <p:spPr>
-          <a:xfrm>
-            <a:off x="7498080" y="1874520"/>
-            <a:ext cx="3840480" cy="320040"/>
-          </a:xfrm>
-          <a:prstGeom prst="rect">
-            <a:avLst/>
-          </a:prstGeom>
-          <a:noFill/>
-        </p:spPr>
-        <p:txBody>
-          <a:bodyPr wrap="square" lIns="0" tIns="0" rIns="0" bIns="0" rtlCol="0" anchor="ctr"/>
-          <a:lstStyle/>
-          <a:p>
-            <a:pPr marL="0" indent="0">
-              <a:buNone/>
-            </a:pPr>
-            <a:r>
-              <a:rPr lang="en-US" sz="1200" b="1" kern="0" spc="100" dirty="0">
-                <a:solidFill>
-                  <a:srgbClr val="CADCFC"/>
-                </a:solidFill>
-                <a:latin typeface="Calibri" panose="020F0502020204030204" pitchFamily="34" charset="0"/>
-                <a:ea typeface="Calibri" panose="020F0502020204030204" pitchFamily="34" charset="-122"/>
-                <a:cs typeface="Calibri" panose="020F0502020204030204" pitchFamily="34" charset="-120"/>
-              </a:rPr>
-              <a:t>VALIDATION CHECKS PASSED</a:t>
-            </a:r>
-            <a:endParaRPr lang="en-US" sz="1200" dirty="0"/>
-          </a:p>
-        </p:txBody>
-      </p:sp>
-      <p:sp>
-        <p:nvSpPr>
-          <p:cNvPr id="37" name="Shape 35"/>
-          <p:cNvSpPr/>
-          <p:nvPr/>
-        </p:nvSpPr>
-        <p:spPr>
-          <a:xfrm>
-            <a:off x="7516368" y="2331720"/>
-            <a:ext cx="329184" cy="329184"/>
-          </a:xfrm>
-          <a:prstGeom prst="ellipse">
-            <a:avLst/>
-          </a:prstGeom>
-          <a:solidFill>
-            <a:srgbClr val="CADCFC"/>
-          </a:solidFill>
-        </p:spPr>
-      </p:sp>
-      <p:sp>
-        <p:nvSpPr>
-          <p:cNvPr id="38" name="Text 36"/>
-          <p:cNvSpPr/>
-          <p:nvPr/>
-        </p:nvSpPr>
-        <p:spPr>
-          <a:xfrm>
-            <a:off x="7516368" y="2331720"/>
-            <a:ext cx="329184" cy="329184"/>
-          </a:xfrm>
-          <a:prstGeom prst="rect">
-            <a:avLst/>
-          </a:prstGeom>
-          <a:noFill/>
-        </p:spPr>
-        <p:txBody>
-          <a:bodyPr wrap="square" lIns="0" tIns="0" rIns="0" bIns="0" rtlCol="0" anchor="ctr"/>
-          <a:lstStyle/>
-          <a:p>
-            <a:pPr marL="0" indent="0" algn="ctr">
-              <a:buNone/>
-            </a:pPr>
-            <a:r>
-              <a:rPr lang="en-US" sz="1500" b="1" dirty="0">
-                <a:solidFill>
-                  <a:srgbClr val="1E2761"/>
-                </a:solidFill>
-                <a:latin typeface="Arial" panose="020B0604020202020204" pitchFamily="34" charset="0"/>
-                <a:ea typeface="Arial" panose="020B0604020202020204" pitchFamily="34" charset="-122"/>
-                <a:cs typeface="Arial" panose="020B0604020202020204" pitchFamily="34" charset="-120"/>
-              </a:rPr>
-              <a:t>✓</a:t>
-            </a:r>
-            <a:endParaRPr lang="en-US" sz="1500" dirty="0"/>
-          </a:p>
-        </p:txBody>
-      </p:sp>
-      <p:sp>
-        <p:nvSpPr>
-          <p:cNvPr id="39" name="Text 37"/>
-          <p:cNvSpPr/>
-          <p:nvPr/>
-        </p:nvSpPr>
-        <p:spPr>
-          <a:xfrm>
-            <a:off x="8001000" y="2331720"/>
-            <a:ext cx="3383280" cy="320040"/>
-          </a:xfrm>
-          <a:prstGeom prst="rect">
-            <a:avLst/>
-          </a:prstGeom>
-          <a:noFill/>
-        </p:spPr>
-        <p:txBody>
-          <a:bodyPr wrap="square" lIns="0" tIns="0" rIns="0" bIns="0" rtlCol="0" anchor="ctr"/>
-          <a:lstStyle/>
-          <a:p>
-            <a:pPr marL="0" indent="0">
-              <a:buNone/>
-            </a:pPr>
-            <a:r>
-              <a:rPr lang="en-US" sz="1250" b="1" dirty="0">
-                <a:solidFill>
-                  <a:srgbClr val="FFFFFF"/>
-                </a:solidFill>
-                <a:latin typeface="Calibri" panose="020F0502020204030204" pitchFamily="34" charset="0"/>
-                <a:ea typeface="Calibri" panose="020F0502020204030204" pitchFamily="34" charset="-122"/>
-                <a:cs typeface="Calibri" panose="020F0502020204030204" pitchFamily="34" charset="-120"/>
-              </a:rPr>
-              <a:t>No overfitting</a:t>
-            </a:r>
-            <a:endParaRPr lang="en-US" sz="1250" dirty="0"/>
-          </a:p>
-        </p:txBody>
-      </p:sp>
-      <p:sp>
-        <p:nvSpPr>
-          <p:cNvPr id="40" name="Text 38"/>
-          <p:cNvSpPr/>
-          <p:nvPr/>
-        </p:nvSpPr>
-        <p:spPr>
-          <a:xfrm>
-            <a:off x="8001000" y="2624328"/>
-            <a:ext cx="3383280" cy="548640"/>
-          </a:xfrm>
-          <a:prstGeom prst="rect">
-            <a:avLst/>
-          </a:prstGeom>
-          <a:noFill/>
-        </p:spPr>
-        <p:txBody>
-          <a:bodyPr wrap="square" lIns="0" tIns="0" rIns="0" bIns="0" rtlCol="0" anchor="ctr"/>
-          <a:lstStyle/>
-          <a:p>
-            <a:pPr marL="0" indent="0">
-              <a:lnSpc>
-                <a:spcPct val="125000"/>
-              </a:lnSpc>
-              <a:buNone/>
-            </a:pPr>
-            <a:r>
-              <a:rPr lang="en-US" sz="1050" dirty="0">
-                <a:solidFill>
-                  <a:srgbClr val="CADCFC"/>
-                </a:solidFill>
-                <a:latin typeface="Calibri" panose="020F0502020204030204" pitchFamily="34" charset="0"/>
-                <a:ea typeface="Calibri" panose="020F0502020204030204" pitchFamily="34" charset="-122"/>
-                <a:cs typeface="Calibri" panose="020F0502020204030204" pitchFamily="34" charset="-120"/>
-              </a:rPr>
-              <a:t>Train accuracy 0.991 vs. test 0.988 — a gap of only ~0.3%</a:t>
-            </a:r>
-            <a:endParaRPr lang="en-US" sz="1050" dirty="0"/>
-          </a:p>
-        </p:txBody>
-      </p:sp>
-      <p:sp>
-        <p:nvSpPr>
-          <p:cNvPr id="41" name="Shape 39"/>
-          <p:cNvSpPr/>
-          <p:nvPr/>
-        </p:nvSpPr>
-        <p:spPr>
-          <a:xfrm>
-            <a:off x="7516368" y="3291840"/>
-            <a:ext cx="329184" cy="329184"/>
-          </a:xfrm>
-          <a:prstGeom prst="ellipse">
-            <a:avLst/>
-          </a:prstGeom>
-          <a:solidFill>
-            <a:srgbClr val="CADCFC"/>
-          </a:solidFill>
-        </p:spPr>
-      </p:sp>
-      <p:sp>
-        <p:nvSpPr>
-          <p:cNvPr id="42" name="Text 40"/>
-          <p:cNvSpPr/>
-          <p:nvPr/>
-        </p:nvSpPr>
-        <p:spPr>
-          <a:xfrm>
-            <a:off x="7516368" y="3291840"/>
-            <a:ext cx="329184" cy="329184"/>
-          </a:xfrm>
-          <a:prstGeom prst="rect">
-            <a:avLst/>
-          </a:prstGeom>
-          <a:noFill/>
-        </p:spPr>
-        <p:txBody>
-          <a:bodyPr wrap="square" lIns="0" tIns="0" rIns="0" bIns="0" rtlCol="0" anchor="ctr"/>
-          <a:lstStyle/>
-          <a:p>
-            <a:pPr marL="0" indent="0" algn="ctr">
-              <a:buNone/>
-            </a:pPr>
-            <a:r>
-              <a:rPr lang="en-US" sz="1500" b="1" dirty="0">
-                <a:solidFill>
-                  <a:srgbClr val="1E2761"/>
-                </a:solidFill>
-                <a:latin typeface="Arial" panose="020B0604020202020204" pitchFamily="34" charset="0"/>
-                <a:ea typeface="Arial" panose="020B0604020202020204" pitchFamily="34" charset="-122"/>
-                <a:cs typeface="Arial" panose="020B0604020202020204" pitchFamily="34" charset="-120"/>
-              </a:rPr>
-              <a:t>✓</a:t>
-            </a:r>
-            <a:endParaRPr lang="en-US" sz="1500" dirty="0"/>
-          </a:p>
-        </p:txBody>
-      </p:sp>
-      <p:sp>
-        <p:nvSpPr>
-          <p:cNvPr id="43" name="Text 41"/>
-          <p:cNvSpPr/>
-          <p:nvPr/>
-        </p:nvSpPr>
-        <p:spPr>
-          <a:xfrm>
-            <a:off x="8001000" y="3291840"/>
-            <a:ext cx="3383280" cy="320040"/>
-          </a:xfrm>
-          <a:prstGeom prst="rect">
-            <a:avLst/>
-          </a:prstGeom>
-          <a:noFill/>
-        </p:spPr>
-        <p:txBody>
-          <a:bodyPr wrap="square" lIns="0" tIns="0" rIns="0" bIns="0" rtlCol="0" anchor="ctr"/>
-          <a:lstStyle/>
-          <a:p>
-            <a:pPr marL="0" indent="0">
-              <a:buNone/>
-            </a:pPr>
-            <a:r>
-              <a:rPr lang="en-US" sz="1250" b="1" dirty="0">
-                <a:solidFill>
-                  <a:srgbClr val="FFFFFF"/>
-                </a:solidFill>
-                <a:latin typeface="Calibri" panose="020F0502020204030204" pitchFamily="34" charset="0"/>
-                <a:ea typeface="Calibri" panose="020F0502020204030204" pitchFamily="34" charset="-122"/>
-                <a:cs typeface="Calibri" panose="020F0502020204030204" pitchFamily="34" charset="-120"/>
-              </a:rPr>
-              <a:t>No data leakage</a:t>
-            </a:r>
-            <a:endParaRPr lang="en-US" sz="1250" dirty="0"/>
-          </a:p>
-        </p:txBody>
-      </p:sp>
-      <p:sp>
-        <p:nvSpPr>
-          <p:cNvPr id="44" name="Text 42"/>
-          <p:cNvSpPr/>
-          <p:nvPr/>
-        </p:nvSpPr>
-        <p:spPr>
-          <a:xfrm>
-            <a:off x="8001000" y="3584448"/>
-            <a:ext cx="3383280" cy="548640"/>
-          </a:xfrm>
-          <a:prstGeom prst="rect">
-            <a:avLst/>
-          </a:prstGeom>
-          <a:noFill/>
-        </p:spPr>
-        <p:txBody>
-          <a:bodyPr wrap="square" lIns="0" tIns="0" rIns="0" bIns="0" rtlCol="0" anchor="ctr"/>
-          <a:lstStyle/>
-          <a:p>
-            <a:pPr marL="0" indent="0">
-              <a:lnSpc>
-                <a:spcPct val="125000"/>
-              </a:lnSpc>
-              <a:buNone/>
-            </a:pPr>
-            <a:r>
-              <a:rPr lang="en-US" sz="1050" dirty="0">
-                <a:solidFill>
-                  <a:srgbClr val="CADCFC"/>
-                </a:solidFill>
-                <a:latin typeface="Calibri" panose="020F0502020204030204" pitchFamily="34" charset="0"/>
-                <a:ea typeface="Calibri" panose="020F0502020204030204" pitchFamily="34" charset="-122"/>
-                <a:cs typeface="Calibri" panose="020F0502020204030204" pitchFamily="34" charset="-120"/>
-              </a:rPr>
-              <a:t>Recall held at 0.96–0.97 even after removing post-transaction balance features</a:t>
-            </a:r>
-            <a:endParaRPr lang="en-US" sz="1050" dirty="0"/>
-          </a:p>
-        </p:txBody>
-      </p:sp>
-      <p:sp>
-        <p:nvSpPr>
-          <p:cNvPr id="45" name="Shape 43"/>
-          <p:cNvSpPr/>
-          <p:nvPr/>
-        </p:nvSpPr>
-        <p:spPr>
-          <a:xfrm>
-            <a:off x="7516368" y="4251960"/>
-            <a:ext cx="329184" cy="329184"/>
-          </a:xfrm>
-          <a:prstGeom prst="ellipse">
-            <a:avLst/>
-          </a:prstGeom>
-          <a:solidFill>
-            <a:srgbClr val="CADCFC"/>
-          </a:solidFill>
-        </p:spPr>
-      </p:sp>
-      <p:sp>
-        <p:nvSpPr>
-          <p:cNvPr id="46" name="Text 44"/>
-          <p:cNvSpPr/>
-          <p:nvPr/>
-        </p:nvSpPr>
-        <p:spPr>
-          <a:xfrm>
-            <a:off x="7516368" y="4251960"/>
-            <a:ext cx="329184" cy="329184"/>
-          </a:xfrm>
-          <a:prstGeom prst="rect">
-            <a:avLst/>
-          </a:prstGeom>
-          <a:noFill/>
-        </p:spPr>
-        <p:txBody>
-          <a:bodyPr wrap="square" lIns="0" tIns="0" rIns="0" bIns="0" rtlCol="0" anchor="ctr"/>
-          <a:lstStyle/>
-          <a:p>
-            <a:pPr marL="0" indent="0" algn="ctr">
-              <a:buNone/>
-            </a:pPr>
-            <a:r>
-              <a:rPr lang="en-US" sz="1500" b="1" dirty="0">
-                <a:solidFill>
-                  <a:srgbClr val="1E2761"/>
-                </a:solidFill>
-                <a:latin typeface="Arial" panose="020B0604020202020204" pitchFamily="34" charset="0"/>
-                <a:ea typeface="Arial" panose="020B0604020202020204" pitchFamily="34" charset="-122"/>
-                <a:cs typeface="Arial" panose="020B0604020202020204" pitchFamily="34" charset="-120"/>
-              </a:rPr>
-              <a:t>✓</a:t>
-            </a:r>
-            <a:endParaRPr lang="en-US" sz="1500" dirty="0"/>
-          </a:p>
-        </p:txBody>
-      </p:sp>
-      <p:sp>
-        <p:nvSpPr>
-          <p:cNvPr id="47" name="Text 45"/>
-          <p:cNvSpPr/>
-          <p:nvPr/>
-        </p:nvSpPr>
-        <p:spPr>
-          <a:xfrm>
-            <a:off x="8001000" y="4251960"/>
-            <a:ext cx="3383280" cy="320040"/>
-          </a:xfrm>
-          <a:prstGeom prst="rect">
-            <a:avLst/>
-          </a:prstGeom>
-          <a:noFill/>
-        </p:spPr>
-        <p:txBody>
-          <a:bodyPr wrap="square" lIns="0" tIns="0" rIns="0" bIns="0" rtlCol="0" anchor="ctr"/>
-          <a:lstStyle/>
-          <a:p>
-            <a:pPr marL="0" indent="0">
-              <a:buNone/>
-            </a:pPr>
-            <a:r>
-              <a:rPr lang="en-US" sz="1250" b="1" dirty="0">
-                <a:solidFill>
-                  <a:srgbClr val="FFFFFF"/>
-                </a:solidFill>
-                <a:latin typeface="Calibri" panose="020F0502020204030204" pitchFamily="34" charset="0"/>
-                <a:ea typeface="Calibri" panose="020F0502020204030204" pitchFamily="34" charset="-122"/>
-                <a:cs typeface="Calibri" panose="020F0502020204030204" pitchFamily="34" charset="-120"/>
-              </a:rPr>
-              <a:t>Imbalance not inflating scores</a:t>
-            </a:r>
-            <a:endParaRPr lang="en-US" sz="1250" dirty="0"/>
-          </a:p>
-        </p:txBody>
-      </p:sp>
-      <p:sp>
-        <p:nvSpPr>
-          <p:cNvPr id="48" name="Text 46"/>
-          <p:cNvSpPr/>
-          <p:nvPr/>
-        </p:nvSpPr>
-        <p:spPr>
-          <a:xfrm>
-            <a:off x="8001000" y="4544568"/>
-            <a:ext cx="3383280" cy="548640"/>
-          </a:xfrm>
-          <a:prstGeom prst="rect">
-            <a:avLst/>
-          </a:prstGeom>
-          <a:noFill/>
-        </p:spPr>
-        <p:txBody>
-          <a:bodyPr wrap="square" lIns="0" tIns="0" rIns="0" bIns="0" rtlCol="0" anchor="ctr"/>
-          <a:lstStyle/>
-          <a:p>
-            <a:pPr marL="0" indent="0">
-              <a:lnSpc>
-                <a:spcPct val="125000"/>
-              </a:lnSpc>
-              <a:buNone/>
-            </a:pPr>
-            <a:r>
-              <a:rPr lang="en-US" sz="1050" dirty="0">
-                <a:solidFill>
-                  <a:srgbClr val="CADCFC"/>
-                </a:solidFill>
-                <a:latin typeface="Calibri" panose="020F0502020204030204" pitchFamily="34" charset="0"/>
-                <a:ea typeface="Calibri" panose="020F0502020204030204" pitchFamily="34" charset="-122"/>
-                <a:cs typeface="Calibri" panose="020F0502020204030204" pitchFamily="34" charset="-120"/>
-              </a:rPr>
-              <a:t>SMOTE rebalancing produced no meaningful change in results</a:t>
-            </a:r>
-            <a:endParaRPr lang="en-US" sz="1050" dirty="0"/>
-          </a:p>
-        </p:txBody>
-      </p:sp>
-      <p:sp>
-        <p:nvSpPr>
-          <p:cNvPr id="49" name="Shape 47"/>
-          <p:cNvSpPr/>
-          <p:nvPr/>
-        </p:nvSpPr>
-        <p:spPr>
-          <a:xfrm>
-            <a:off x="7516368" y="5212080"/>
-            <a:ext cx="329184" cy="329184"/>
-          </a:xfrm>
-          <a:prstGeom prst="ellipse">
-            <a:avLst/>
-          </a:prstGeom>
-          <a:solidFill>
-            <a:srgbClr val="CADCFC"/>
-          </a:solidFill>
-        </p:spPr>
-      </p:sp>
-      <p:sp>
-        <p:nvSpPr>
-          <p:cNvPr id="50" name="Text 48"/>
-          <p:cNvSpPr/>
-          <p:nvPr/>
-        </p:nvSpPr>
-        <p:spPr>
-          <a:xfrm>
-            <a:off x="7516368" y="5212080"/>
-            <a:ext cx="329184" cy="329184"/>
-          </a:xfrm>
-          <a:prstGeom prst="rect">
-            <a:avLst/>
-          </a:prstGeom>
-          <a:noFill/>
-        </p:spPr>
-        <p:txBody>
-          <a:bodyPr wrap="square" lIns="0" tIns="0" rIns="0" bIns="0" rtlCol="0" anchor="ctr"/>
-          <a:lstStyle/>
-          <a:p>
-            <a:pPr marL="0" indent="0" algn="ctr">
-              <a:buNone/>
-            </a:pPr>
-            <a:r>
-              <a:rPr lang="en-US" sz="1500" b="1" dirty="0">
-                <a:solidFill>
-                  <a:srgbClr val="1E2761"/>
-                </a:solidFill>
-                <a:latin typeface="Arial" panose="020B0604020202020204" pitchFamily="34" charset="0"/>
-                <a:ea typeface="Arial" panose="020B0604020202020204" pitchFamily="34" charset="-122"/>
-                <a:cs typeface="Arial" panose="020B0604020202020204" pitchFamily="34" charset="-120"/>
-              </a:rPr>
-              <a:t>✓</a:t>
-            </a:r>
-            <a:endParaRPr lang="en-US" sz="1500" dirty="0"/>
-          </a:p>
-        </p:txBody>
-      </p:sp>
-      <p:sp>
-        <p:nvSpPr>
-          <p:cNvPr id="51" name="Text 49"/>
-          <p:cNvSpPr/>
-          <p:nvPr/>
-        </p:nvSpPr>
-        <p:spPr>
-          <a:xfrm>
-            <a:off x="8001000" y="5212080"/>
-            <a:ext cx="3383280" cy="320040"/>
-          </a:xfrm>
-          <a:prstGeom prst="rect">
-            <a:avLst/>
-          </a:prstGeom>
-          <a:noFill/>
-        </p:spPr>
-        <p:txBody>
-          <a:bodyPr wrap="square" lIns="0" tIns="0" rIns="0" bIns="0" rtlCol="0" anchor="ctr"/>
-          <a:lstStyle/>
-          <a:p>
-            <a:pPr marL="0" indent="0">
-              <a:buNone/>
-            </a:pPr>
-            <a:r>
-              <a:rPr lang="en-US" sz="1250" b="1" dirty="0">
-                <a:solidFill>
-                  <a:srgbClr val="FFFFFF"/>
-                </a:solidFill>
-                <a:latin typeface="Calibri" panose="020F0502020204030204" pitchFamily="34" charset="0"/>
-                <a:ea typeface="Calibri" panose="020F0502020204030204" pitchFamily="34" charset="-122"/>
-                <a:cs typeface="Calibri" panose="020F0502020204030204" pitchFamily="34" charset="-120"/>
-              </a:rPr>
-              <a:t>Matches best alternative</a:t>
-            </a:r>
-            <a:endParaRPr lang="en-US" sz="1250" dirty="0"/>
-          </a:p>
-        </p:txBody>
-      </p:sp>
-      <p:sp>
-        <p:nvSpPr>
-          <p:cNvPr id="52" name="Text 50"/>
-          <p:cNvSpPr/>
-          <p:nvPr/>
-        </p:nvSpPr>
-        <p:spPr>
-          <a:xfrm>
-            <a:off x="8001000" y="5504688"/>
-            <a:ext cx="3383280" cy="548640"/>
-          </a:xfrm>
-          <a:prstGeom prst="rect">
-            <a:avLst/>
-          </a:prstGeom>
-          <a:noFill/>
-        </p:spPr>
-        <p:txBody>
-          <a:bodyPr wrap="square" lIns="0" tIns="0" rIns="0" bIns="0" rtlCol="0" anchor="ctr"/>
-          <a:lstStyle/>
-          <a:p>
-            <a:pPr marL="0" indent="0">
-              <a:lnSpc>
-                <a:spcPct val="125000"/>
-              </a:lnSpc>
-              <a:buNone/>
-            </a:pPr>
-            <a:r>
-              <a:rPr lang="en-US" sz="1050" dirty="0">
-                <a:solidFill>
-                  <a:srgbClr val="CADCFC"/>
-                </a:solidFill>
-                <a:latin typeface="Calibri" panose="020F0502020204030204" pitchFamily="34" charset="0"/>
-                <a:ea typeface="Calibri" panose="020F0502020204030204" pitchFamily="34" charset="-122"/>
-                <a:cs typeface="Calibri" panose="020F0502020204030204" pitchFamily="34" charset="-120"/>
-              </a:rPr>
-              <a:t>Statistically tied with XGBoost on precision, recall, and F1</a:t>
-            </a:r>
-            <a:endParaRPr lang="en-US" sz="1050" dirty="0"/>
-          </a:p>
-        </p:txBody>
-      </p:sp>
-      <p:sp>
-        <p:nvSpPr>
           <p:cNvPr id="53" name="Text 51"/>
           <p:cNvSpPr/>
           <p:nvPr/>
@@ -6573,6 +6356,136 @@
               <a:t>10</a:t>
             </a:r>
             <a:endParaRPr lang="en-US" sz="900" dirty="0"/>
+          </a:p>
+        </p:txBody>
+      </p:sp>
+      <p:sp>
+        <p:nvSpPr>
+          <p:cNvPr id="56" name="Text Box 55"/>
+          <p:cNvSpPr txBox="1"/>
+          <p:nvPr/>
+        </p:nvSpPr>
+        <p:spPr>
+          <a:xfrm>
+            <a:off x="7395845" y="1913890"/>
+            <a:ext cx="3942715" cy="3998595"/>
+          </a:xfrm>
+          <a:prstGeom prst="rect">
+            <a:avLst/>
+          </a:prstGeom>
+          <a:noFill/>
+        </p:spPr>
+        <p:txBody>
+          <a:bodyPr wrap="square" rtlCol="0">
+            <a:noAutofit/>
+          </a:bodyPr>
+          <a:p>
+            <a:pPr marL="285750" indent="-285750">
+              <a:buFont typeface="Wingdings" panose="05000000000000000000" charset="0"/>
+              <a:buChar char="Ø"/>
+            </a:pPr>
+            <a:r>
+              <a:rPr lang="en-US" altLang="en-US" sz="2000" b="1">
+                <a:solidFill>
+                  <a:schemeClr val="bg1"/>
+                </a:solidFill>
+                <a:cs typeface="+mn-lt"/>
+              </a:rPr>
+              <a:t>Train accuracy 0.989 vs. test 0.986, a gap of only ~0.3%.</a:t>
+            </a:r>
+            <a:endParaRPr lang="en-US" altLang="en-US" sz="2000" b="1">
+              <a:solidFill>
+                <a:schemeClr val="bg1"/>
+              </a:solidFill>
+              <a:cs typeface="+mn-lt"/>
+            </a:endParaRPr>
+          </a:p>
+          <a:p>
+            <a:pPr marL="285750" indent="-285750">
+              <a:buFont typeface="Wingdings" panose="05000000000000000000" charset="0"/>
+              <a:buChar char="Ø"/>
+            </a:pPr>
+            <a:r>
+              <a:rPr lang="en-US" altLang="en-US" sz="2000" b="1">
+                <a:solidFill>
+                  <a:schemeClr val="bg1"/>
+                </a:solidFill>
+                <a:cs typeface="+mn-lt"/>
+              </a:rPr>
+              <a:t>Leakage found and removed.</a:t>
+            </a:r>
+            <a:endParaRPr lang="en-US" altLang="en-US" sz="2000" b="1">
+              <a:solidFill>
+                <a:schemeClr val="bg1"/>
+              </a:solidFill>
+              <a:cs typeface="+mn-lt"/>
+            </a:endParaRPr>
+          </a:p>
+          <a:p>
+            <a:pPr marL="285750" indent="-285750">
+              <a:buFont typeface="Wingdings" panose="05000000000000000000" charset="0"/>
+              <a:buChar char="Ø"/>
+            </a:pPr>
+            <a:r>
+              <a:rPr lang="en-US" altLang="en-US" sz="2000" b="1">
+                <a:solidFill>
+                  <a:schemeClr val="bg1"/>
+                </a:solidFill>
+                <a:cs typeface="+mn-lt"/>
+              </a:rPr>
+              <a:t>Post-transaction balances and step removed; only pre-transaction features used.</a:t>
+            </a:r>
+            <a:endParaRPr lang="en-US" altLang="en-US" sz="2000" b="1">
+              <a:solidFill>
+                <a:schemeClr val="bg1"/>
+              </a:solidFill>
+              <a:cs typeface="+mn-lt"/>
+            </a:endParaRPr>
+          </a:p>
+          <a:p>
+            <a:pPr marL="285750" indent="-285750">
+              <a:buFont typeface="Wingdings" panose="05000000000000000000" charset="0"/>
+              <a:buChar char="Ø"/>
+            </a:pPr>
+            <a:r>
+              <a:rPr lang="en-US" altLang="en-US" sz="2000" b="1">
+                <a:solidFill>
+                  <a:schemeClr val="bg1"/>
+                </a:solidFill>
+                <a:cs typeface="+mn-lt"/>
+              </a:rPr>
+              <a:t>Imbalance handled.</a:t>
+            </a:r>
+            <a:endParaRPr lang="en-US" altLang="en-US" sz="2000" b="1">
+              <a:solidFill>
+                <a:schemeClr val="bg1"/>
+              </a:solidFill>
+              <a:cs typeface="+mn-lt"/>
+            </a:endParaRPr>
+          </a:p>
+          <a:p>
+            <a:pPr marL="285750" indent="-285750">
+              <a:buFont typeface="Wingdings" panose="05000000000000000000" charset="0"/>
+              <a:buChar char="Ø"/>
+            </a:pPr>
+            <a:r>
+              <a:rPr lang="en-US" altLang="en-US" sz="2000" b="1">
+                <a:solidFill>
+                  <a:schemeClr val="bg1"/>
+                </a:solidFill>
+                <a:cs typeface="+mn-lt"/>
+              </a:rPr>
+              <a:t>class_weight='balanced' used; judged on precision, recall, F1 and PR-AUC</a:t>
+            </a:r>
+            <a:r>
+              <a:rPr lang="en-US" altLang="en-US" sz="2000" b="1">
+                <a:cs typeface="+mn-lt"/>
+              </a:rPr>
+              <a:t>.</a:t>
+            </a:r>
+            <a:endParaRPr lang="en-US" altLang="en-US" sz="2000" b="1">
+              <a:cs typeface="+mn-lt"/>
+            </a:endParaRPr>
           </a:p>
         </p:txBody>
       </p:sp>
@@ -6921,7 +6834,7 @@
         </p:nvSpPr>
         <p:spPr>
           <a:xfrm>
-            <a:off x="1737360" y="2148840"/>
+            <a:off x="1737360" y="2194560"/>
             <a:ext cx="1554480" cy="1554480"/>
           </a:xfrm>
           <a:prstGeom prst="rect">
@@ -6962,17 +6875,18 @@
               <a:buNone/>
             </a:pPr>
             <a:r>
-              <a:rPr lang="en-US" sz="3000" b="1" dirty="0">
-                <a:solidFill>
-                  <a:srgbClr val="FFFFFF"/>
-                </a:solidFill>
-                <a:latin typeface="Cambria" panose="02040503050406030204" pitchFamily="34" charset="0"/>
-                <a:ea typeface="Cambria" panose="02040503050406030204" pitchFamily="34" charset="-122"/>
-                <a:cs typeface="Cambria" panose="02040503050406030204" pitchFamily="34" charset="-120"/>
-              </a:rPr>
-              <a:t>2,001</a:t>
-            </a:r>
-            <a:endParaRPr lang="en-US" sz="3000" dirty="0"/>
+              <a:rPr lang="en-US" sz="3000" dirty="0">
+                <a:solidFill>
+                  <a:schemeClr val="bg1"/>
+                </a:solidFill>
+              </a:rPr>
+              <a:t>1973</a:t>
+            </a:r>
+            <a:endParaRPr lang="en-US" sz="3000" dirty="0">
+              <a:solidFill>
+                <a:schemeClr val="bg1"/>
+              </a:solidFill>
+            </a:endParaRPr>
           </a:p>
         </p:txBody>
       </p:sp>
@@ -7063,17 +6977,50 @@
               <a:buNone/>
             </a:pPr>
             <a:r>
-              <a:rPr lang="en-US" sz="3000" b="1" dirty="0">
-                <a:solidFill>
-                  <a:srgbClr val="C0392B"/>
-                </a:solidFill>
-                <a:latin typeface="Cambria" panose="02040503050406030204" pitchFamily="34" charset="0"/>
-                <a:ea typeface="Cambria" panose="02040503050406030204" pitchFamily="34" charset="-122"/>
-                <a:cs typeface="Cambria" panose="02040503050406030204" pitchFamily="34" charset="-120"/>
-              </a:rPr>
-              <a:t>0</a:t>
-            </a:r>
-            <a:endParaRPr lang="en-US" sz="3000" dirty="0"/>
+              <a:rPr lang="en-US" sz="3000" dirty="0">
+                <a:gradFill>
+                  <a:gsLst>
+                    <a:gs pos="50000">
+                      <a:schemeClr val="tx1"/>
+                    </a:gs>
+                    <a:gs pos="0">
+                      <a:schemeClr val="tx1">
+                        <a:lumMod val="25000"/>
+                        <a:lumOff val="75000"/>
+                      </a:schemeClr>
+                    </a:gs>
+                    <a:gs pos="100000">
+                      <a:schemeClr val="tx1">
+                        <a:lumMod val="85000"/>
+                      </a:schemeClr>
+                    </a:gs>
+                  </a:gsLst>
+                  <a:lin ang="5400000" scaled="1"/>
+                </a:gradFill>
+              </a:rPr>
+              <a:t>28</a:t>
+            </a:r>
+            <a:endParaRPr lang="en-US" sz="3000" dirty="0">
+              <a:gradFill>
+                <a:gsLst>
+                  <a:gs pos="50000">
+                    <a:schemeClr val="tx1"/>
+                  </a:gs>
+                  <a:gs pos="0">
+                    <a:schemeClr val="tx1">
+                      <a:lumMod val="25000"/>
+                      <a:lumOff val="75000"/>
+                    </a:schemeClr>
+                  </a:gs>
+                  <a:gs pos="100000">
+                    <a:schemeClr val="tx1">
+                      <a:lumMod val="85000"/>
+                    </a:schemeClr>
+                  </a:gs>
+                </a:gsLst>
+                <a:lin ang="5400000" scaled="1"/>
+              </a:gradFill>
+            </a:endParaRPr>
           </a:p>
         </p:txBody>
       </p:sp>
@@ -7164,15 +7111,8 @@
               <a:buNone/>
             </a:pPr>
             <a:r>
-              <a:rPr lang="en-US" sz="3000" b="1" dirty="0">
-                <a:solidFill>
-                  <a:srgbClr val="C0392B"/>
-                </a:solidFill>
-                <a:latin typeface="Cambria" panose="02040503050406030204" pitchFamily="34" charset="0"/>
-                <a:ea typeface="Cambria" panose="02040503050406030204" pitchFamily="34" charset="-122"/>
-                <a:cs typeface="Cambria" panose="02040503050406030204" pitchFamily="34" charset="-120"/>
-              </a:rPr>
-              <a:t>7</a:t>
+              <a:rPr lang="en-US" sz="3000" dirty="0"/>
+              <a:t>4</a:t>
             </a:r>
             <a:endParaRPr lang="en-US" sz="3000" dirty="0"/>
           </a:p>
@@ -7265,17 +7205,18 @@
               <a:buNone/>
             </a:pPr>
             <a:r>
-              <a:rPr lang="en-US" sz="3000" b="1" dirty="0">
-                <a:solidFill>
-                  <a:srgbClr val="FFFFFF"/>
-                </a:solidFill>
-                <a:latin typeface="Cambria" panose="02040503050406030204" pitchFamily="34" charset="0"/>
-                <a:ea typeface="Cambria" panose="02040503050406030204" pitchFamily="34" charset="-122"/>
-                <a:cs typeface="Cambria" panose="02040503050406030204" pitchFamily="34" charset="-120"/>
-              </a:rPr>
-              <a:t>221</a:t>
-            </a:r>
-            <a:endParaRPr lang="en-US" sz="3000" dirty="0"/>
+              <a:rPr lang="en-US" sz="3000" dirty="0">
+                <a:solidFill>
+                  <a:schemeClr val="bg1"/>
+                </a:solidFill>
+              </a:rPr>
+              <a:t>224</a:t>
+            </a:r>
+            <a:endParaRPr lang="en-US" sz="3000" dirty="0">
+              <a:solidFill>
+                <a:schemeClr val="bg1"/>
+              </a:solidFill>
+            </a:endParaRPr>
           </a:p>
         </p:txBody>
       </p:sp>
@@ -7427,7 +7368,7 @@
                 <a:ea typeface="Calibri" panose="020F0502020204030204" pitchFamily="34" charset="-122"/>
                 <a:cs typeface="Calibri" panose="020F0502020204030204" pitchFamily="34" charset="-120"/>
               </a:rPr>
-              <a:t>221 fraud cases caught</a:t>
+              <a:t>224 fraud cases caught</a:t>
             </a:r>
             <a:endParaRPr lang="en-US" sz="1300" dirty="0"/>
           </a:p>
@@ -7546,7 +7487,7 @@
                 <a:ea typeface="Calibri" panose="020F0502020204030204" pitchFamily="34" charset="-122"/>
                 <a:cs typeface="Calibri" panose="020F0502020204030204" pitchFamily="34" charset="-120"/>
               </a:rPr>
-              <a:t>7 fraud cases missed</a:t>
+              <a:t>4 fraud cases missed</a:t>
             </a:r>
             <a:endParaRPr lang="en-US" sz="1300" dirty="0"/>
           </a:p>
@@ -7665,7 +7606,7 @@
                 <a:ea typeface="Calibri" panose="020F0502020204030204" pitchFamily="34" charset="-122"/>
                 <a:cs typeface="Calibri" panose="020F0502020204030204" pitchFamily="34" charset="-120"/>
               </a:rPr>
-              <a:t>0 false alarms</a:t>
+              <a:t>28 false alarms</a:t>
             </a:r>
             <a:endParaRPr lang="en-US" sz="1300" dirty="0"/>
           </a:p>
@@ -7697,17 +7638,6 @@
               </a:lnSpc>
               <a:buNone/>
             </a:pPr>
-            <a:r>
-              <a:rPr lang="en-US" sz="1100" dirty="0">
-                <a:solidFill>
-                  <a:srgbClr val="5A6285"/>
-                </a:solidFill>
-                <a:latin typeface="Calibri" panose="020F0502020204030204" pitchFamily="34" charset="0"/>
-                <a:ea typeface="Calibri" panose="020F0502020204030204" pitchFamily="34" charset="-122"/>
-                <a:cs typeface="Calibri" panose="020F0502020204030204" pitchFamily="34" charset="-120"/>
-              </a:rPr>
-              <a:t>No legitimate transaction was ever flagged as fraud</a:t>
-            </a:r>
             <a:endParaRPr lang="en-US" sz="1100" dirty="0"/>
           </a:p>
         </p:txBody>
@@ -7917,6 +7847,12 @@
             <a:srgbClr val="263080"/>
           </a:solidFill>
         </p:spPr>
+        <p:txBody>
+          <a:bodyPr/>
+          <a:p>
+            <a:endParaRPr lang="en-US"/>
+          </a:p>
+        </p:txBody>
       </p:sp>
       <p:sp>
         <p:nvSpPr>
@@ -7941,6 +7877,14 @@
             <a:pPr marL="0" indent="0" algn="ctr">
               <a:buNone/>
             </a:pPr>
+            <a:r>
+              <a:rPr lang="en-US" sz="3200" dirty="0">
+                <a:solidFill>
+                  <a:schemeClr val="bg1"/>
+                </a:solidFill>
+              </a:rPr>
+              <a:t>0.</a:t>
+            </a:r>
             <a:r>
               <a:rPr lang="en-US" sz="3200" b="1" dirty="0">
                 <a:solidFill>
@@ -7950,9 +7894,13 @@
                 <a:ea typeface="Cambria" panose="02040503050406030204" pitchFamily="34" charset="-122"/>
                 <a:cs typeface="Cambria" panose="02040503050406030204" pitchFamily="34" charset="-120"/>
               </a:rPr>
-              <a:t>1.00</a:t>
-            </a:r>
-            <a:endParaRPr lang="en-US" sz="3200" dirty="0"/>
+              <a:t>90</a:t>
+            </a:r>
+            <a:endParaRPr lang="en-US" sz="3200" dirty="0">
+              <a:solidFill>
+                <a:schemeClr val="bg1"/>
+              </a:solidFill>
+            </a:endParaRPr>
           </a:p>
         </p:txBody>
       </p:sp>
@@ -8047,7 +7995,7 @@
                 <a:ea typeface="Cambria" panose="02040503050406030204" pitchFamily="34" charset="-122"/>
                 <a:cs typeface="Cambria" panose="02040503050406030204" pitchFamily="34" charset="-120"/>
               </a:rPr>
-              <a:t>0.97</a:t>
+              <a:t>0.98</a:t>
             </a:r>
             <a:endParaRPr lang="en-US" sz="3200" dirty="0"/>
           </a:p>
@@ -8144,7 +8092,7 @@
                 <a:ea typeface="Cambria" panose="02040503050406030204" pitchFamily="34" charset="-122"/>
                 <a:cs typeface="Cambria" panose="02040503050406030204" pitchFamily="34" charset="-120"/>
               </a:rPr>
-              <a:t>0.98</a:t>
+              <a:t>0.94</a:t>
             </a:r>
             <a:endParaRPr lang="en-US" sz="3200" dirty="0"/>
           </a:p>
@@ -8241,7 +8189,7 @@
                 <a:ea typeface="Cambria" panose="02040503050406030204" pitchFamily="34" charset="-122"/>
                 <a:cs typeface="Cambria" panose="02040503050406030204" pitchFamily="34" charset="-120"/>
               </a:rPr>
-              <a:t>1.00</a:t>
+              <a:t>0.99</a:t>
             </a:r>
             <a:endParaRPr lang="en-US" sz="3200" dirty="0"/>
           </a:p>
@@ -8325,13 +8273,51 @@
       </p:sp>
       <p:sp>
         <p:nvSpPr>
-          <p:cNvPr id="17" name="Shape 15"/>
+          <p:cNvPr id="18" name="Text 16"/>
           <p:cNvSpPr/>
           <p:nvPr/>
         </p:nvSpPr>
         <p:spPr>
           <a:xfrm>
             <a:off x="548640" y="4343400"/>
+            <a:ext cx="2011680" cy="502920"/>
+          </a:xfrm>
+          <a:prstGeom prst="rect">
+            <a:avLst/>
+          </a:prstGeom>
+          <a:noFill/>
+        </p:spPr>
+        <p:txBody>
+          <a:bodyPr wrap="square" lIns="0" tIns="0" rIns="0" bIns="0" rtlCol="0" anchor="ctr"/>
+          <a:lstStyle/>
+          <a:p>
+            <a:pPr marL="0" indent="0" algn="ctr">
+              <a:buNone/>
+            </a:pPr>
+            <a:r>
+              <a:rPr lang="en-US" sz="1050" dirty="0">
+                <a:solidFill>
+                  <a:srgbClr val="1E2761"/>
+                </a:solidFill>
+                <a:latin typeface="Courier New" panose="02070309020205020404" pitchFamily="34" charset="0"/>
+                <a:ea typeface="Courier New" panose="02070309020205020404" pitchFamily="34" charset="-122"/>
+                <a:cs typeface="Courier New" panose="02070309020205020404" pitchFamily="34" charset="-120"/>
+              </a:rPr>
+              <a:t>step</a:t>
+            </a:r>
+            <a:endParaRPr lang="en-US" sz="1050" dirty="0"/>
+          </a:p>
+        </p:txBody>
+      </p:sp>
+      <p:sp>
+        <p:nvSpPr>
+          <p:cNvPr id="19" name="Shape 17"/>
+          <p:cNvSpPr/>
+          <p:nvPr/>
+        </p:nvSpPr>
+        <p:spPr>
+          <a:xfrm>
+            <a:off x="2761488" y="4343400"/>
             <a:ext cx="2011680" cy="502920"/>
           </a:xfrm>
           <a:prstGeom prst="roundRect">
@@ -8346,13 +8332,13 @@
       </p:sp>
       <p:sp>
         <p:nvSpPr>
-          <p:cNvPr id="18" name="Text 16"/>
-          <p:cNvSpPr/>
-          <p:nvPr/>
-        </p:nvSpPr>
-        <p:spPr>
-          <a:xfrm>
-            <a:off x="548640" y="4343400"/>
+          <p:cNvPr id="20" name="Text 18"/>
+          <p:cNvSpPr/>
+          <p:nvPr/>
+        </p:nvSpPr>
+        <p:spPr>
+          <a:xfrm>
+            <a:off x="2761488" y="4343400"/>
             <a:ext cx="2011680" cy="502920"/>
           </a:xfrm>
           <a:prstGeom prst="rect">
@@ -8376,7 +8362,7 @@
                 <a:ea typeface="Courier New" panose="02070309020205020404" pitchFamily="34" charset="-122"/>
                 <a:cs typeface="Courier New" panose="02070309020205020404" pitchFamily="34" charset="-120"/>
               </a:rPr>
-              <a:t>step</a:t>
+              <a:t>type (one-hot)</a:t>
             </a:r>
             <a:endParaRPr lang="en-US" sz="1050" dirty="0"/>
           </a:p>
@@ -8384,13 +8370,13 @@
       </p:sp>
       <p:sp>
         <p:nvSpPr>
-          <p:cNvPr id="19" name="Shape 17"/>
-          <p:cNvSpPr/>
-          <p:nvPr/>
-        </p:nvSpPr>
-        <p:spPr>
-          <a:xfrm>
-            <a:off x="2761488" y="4343400"/>
+          <p:cNvPr id="21" name="Shape 19"/>
+          <p:cNvSpPr/>
+          <p:nvPr/>
+        </p:nvSpPr>
+        <p:spPr>
+          <a:xfrm>
+            <a:off x="4974336" y="4343400"/>
             <a:ext cx="2011680" cy="502920"/>
           </a:xfrm>
           <a:prstGeom prst="roundRect">
@@ -8405,13 +8391,13 @@
       </p:sp>
       <p:sp>
         <p:nvSpPr>
-          <p:cNvPr id="20" name="Text 18"/>
-          <p:cNvSpPr/>
-          <p:nvPr/>
-        </p:nvSpPr>
-        <p:spPr>
-          <a:xfrm>
-            <a:off x="2761488" y="4343400"/>
+          <p:cNvPr id="22" name="Text 20"/>
+          <p:cNvSpPr/>
+          <p:nvPr/>
+        </p:nvSpPr>
+        <p:spPr>
+          <a:xfrm>
+            <a:off x="4974336" y="4343400"/>
             <a:ext cx="2011680" cy="502920"/>
           </a:xfrm>
           <a:prstGeom prst="rect">
@@ -8435,7 +8421,7 @@
                 <a:ea typeface="Courier New" panose="02070309020205020404" pitchFamily="34" charset="-122"/>
                 <a:cs typeface="Courier New" panose="02070309020205020404" pitchFamily="34" charset="-120"/>
               </a:rPr>
-              <a:t>type (one-hot)</a:t>
+              <a:t>amount</a:t>
             </a:r>
             <a:endParaRPr lang="en-US" sz="1050" dirty="0"/>
           </a:p>
@@ -8443,13 +8429,13 @@
       </p:sp>
       <p:sp>
         <p:nvSpPr>
-          <p:cNvPr id="21" name="Shape 19"/>
-          <p:cNvSpPr/>
-          <p:nvPr/>
-        </p:nvSpPr>
-        <p:spPr>
-          <a:xfrm>
-            <a:off x="4974336" y="4343400"/>
+          <p:cNvPr id="23" name="Shape 21"/>
+          <p:cNvSpPr/>
+          <p:nvPr/>
+        </p:nvSpPr>
+        <p:spPr>
+          <a:xfrm>
+            <a:off x="7187184" y="4343400"/>
             <a:ext cx="2011680" cy="502920"/>
           </a:xfrm>
           <a:prstGeom prst="roundRect">
@@ -8464,13 +8450,13 @@
       </p:sp>
       <p:sp>
         <p:nvSpPr>
-          <p:cNvPr id="22" name="Text 20"/>
-          <p:cNvSpPr/>
-          <p:nvPr/>
-        </p:nvSpPr>
-        <p:spPr>
-          <a:xfrm>
-            <a:off x="4974336" y="4343400"/>
+          <p:cNvPr id="24" name="Text 22"/>
+          <p:cNvSpPr/>
+          <p:nvPr/>
+        </p:nvSpPr>
+        <p:spPr>
+          <a:xfrm>
+            <a:off x="7187184" y="4343400"/>
             <a:ext cx="2011680" cy="502920"/>
           </a:xfrm>
           <a:prstGeom prst="rect">
@@ -8494,7 +8480,7 @@
                 <a:ea typeface="Courier New" panose="02070309020205020404" pitchFamily="34" charset="-122"/>
                 <a:cs typeface="Courier New" panose="02070309020205020404" pitchFamily="34" charset="-120"/>
               </a:rPr>
-              <a:t>amount</a:t>
+              <a:t>oldbalanceOrg</a:t>
             </a:r>
             <a:endParaRPr lang="en-US" sz="1050" dirty="0"/>
           </a:p>
@@ -8502,13 +8488,13 @@
       </p:sp>
       <p:sp>
         <p:nvSpPr>
-          <p:cNvPr id="23" name="Shape 21"/>
-          <p:cNvSpPr/>
-          <p:nvPr/>
-        </p:nvSpPr>
-        <p:spPr>
-          <a:xfrm>
-            <a:off x="7187184" y="4343400"/>
+          <p:cNvPr id="25" name="Shape 23"/>
+          <p:cNvSpPr/>
+          <p:nvPr/>
+        </p:nvSpPr>
+        <p:spPr>
+          <a:xfrm>
+            <a:off x="9400032" y="4343400"/>
             <a:ext cx="2011680" cy="502920"/>
           </a:xfrm>
           <a:prstGeom prst="roundRect">
@@ -8523,65 +8509,6 @@
       </p:sp>
       <p:sp>
         <p:nvSpPr>
-          <p:cNvPr id="24" name="Text 22"/>
-          <p:cNvSpPr/>
-          <p:nvPr/>
-        </p:nvSpPr>
-        <p:spPr>
-          <a:xfrm>
-            <a:off x="7187184" y="4343400"/>
-            <a:ext cx="2011680" cy="502920"/>
-          </a:xfrm>
-          <a:prstGeom prst="rect">
-            <a:avLst/>
-          </a:prstGeom>
-          <a:noFill/>
-        </p:spPr>
-        <p:txBody>
-          <a:bodyPr wrap="square" lIns="0" tIns="0" rIns="0" bIns="0" rtlCol="0" anchor="ctr"/>
-          <a:lstStyle/>
-          <a:p>
-            <a:pPr marL="0" indent="0" algn="ctr">
-              <a:buNone/>
-            </a:pPr>
-            <a:r>
-              <a:rPr lang="en-US" sz="1050" dirty="0">
-                <a:solidFill>
-                  <a:srgbClr val="1E2761"/>
-                </a:solidFill>
-                <a:latin typeface="Courier New" panose="02070309020205020404" pitchFamily="34" charset="0"/>
-                <a:ea typeface="Courier New" panose="02070309020205020404" pitchFamily="34" charset="-122"/>
-                <a:cs typeface="Courier New" panose="02070309020205020404" pitchFamily="34" charset="-120"/>
-              </a:rPr>
-              <a:t>oldbalanceOrg</a:t>
-            </a:r>
-            <a:endParaRPr lang="en-US" sz="1050" dirty="0"/>
-          </a:p>
-        </p:txBody>
-      </p:sp>
-      <p:sp>
-        <p:nvSpPr>
-          <p:cNvPr id="25" name="Shape 23"/>
-          <p:cNvSpPr/>
-          <p:nvPr/>
-        </p:nvSpPr>
-        <p:spPr>
-          <a:xfrm>
-            <a:off x="9400032" y="4343400"/>
-            <a:ext cx="2011680" cy="502920"/>
-          </a:xfrm>
-          <a:prstGeom prst="roundRect">
-            <a:avLst>
-              <a:gd name="adj" fmla="val 49091"/>
-            </a:avLst>
-          </a:prstGeom>
-          <a:solidFill>
-            <a:srgbClr val="CADCFC"/>
-          </a:solidFill>
-        </p:spPr>
-      </p:sp>
-      <p:sp>
-        <p:nvSpPr>
           <p:cNvPr id="26" name="Text 24"/>
           <p:cNvSpPr/>
           <p:nvPr/>
@@ -8653,47 +8580,9 @@
                 <a:ea typeface="Calibri" panose="020F0502020204030204" pitchFamily="34" charset="-122"/>
                 <a:cs typeface="Calibri" panose="020F0502020204030204" pitchFamily="34" charset="-120"/>
               </a:rPr>
-              <a:t>Removed: nameOrig, nameDest, newbalanceOrig, newbalanceDest — IDs and post-transaction fields unavailable (or irrelevant) at prediction time.</a:t>
+              <a:t>Removed: step, nameOrig, nameDest, newbalanceOrig, newbalanceDest — IDs and post-transaction fields unavailable (or irrelevant) at prediction time.</a:t>
             </a:r>
             <a:endParaRPr lang="en-US" sz="1200" dirty="0"/>
-          </a:p>
-        </p:txBody>
-      </p:sp>
-      <p:sp>
-        <p:nvSpPr>
-          <p:cNvPr id="28" name="Text 26"/>
-          <p:cNvSpPr/>
-          <p:nvPr/>
-        </p:nvSpPr>
-        <p:spPr>
-          <a:xfrm>
-            <a:off x="548640" y="5852160"/>
-            <a:ext cx="11064240" cy="457200"/>
-          </a:xfrm>
-          <a:prstGeom prst="rect">
-            <a:avLst/>
-          </a:prstGeom>
-          <a:noFill/>
-        </p:spPr>
-        <p:txBody>
-          <a:bodyPr wrap="square" lIns="0" tIns="0" rIns="0" bIns="0" rtlCol="0" anchor="ctr"/>
-          <a:lstStyle/>
-          <a:p>
-            <a:pPr marL="0" indent="0">
-              <a:buNone/>
-            </a:pPr>
-            <a:r>
-              <a:rPr lang="en-US" sz="1150" dirty="0">
-                <a:solidFill>
-                  <a:srgbClr val="CADCFC"/>
-                </a:solidFill>
-                <a:latin typeface="Calibri" panose="020F0502020204030204" pitchFamily="34" charset="0"/>
-                <a:ea typeface="Calibri" panose="020F0502020204030204" pitchFamily="34" charset="-122"/>
-                <a:cs typeface="Calibri" panose="020F0502020204030204" pitchFamily="34" charset="-120"/>
-              </a:rPr>
-              <a:t>Confirmed stable: train/test accuracy gap ~0.3% (no overfitting) · unaffected by SMOTE rebalancing · unaffected by removing leaky features</a:t>
-            </a:r>
-            <a:endParaRPr lang="en-US" sz="1150" dirty="0"/>
           </a:p>
         </p:txBody>
       </p:sp>
@@ -8846,7 +8735,7 @@
                       <a:pPr algn="ctr"/>
                       <a:r>
                         <a:rPr lang="en-US" altLang="zh-CN" sz="1800"/>
-                        <a:t>99.99%</a:t>
+                        <a:t>99.05%</a:t>
                       </a:r>
                       <a:endParaRPr lang="en-US" altLang="zh-CN" sz="1800"/>
                     </a:p>
@@ -8860,7 +8749,7 @@
                       <a:pPr algn="ctr"/>
                       <a:r>
                         <a:rPr lang="en-US" altLang="zh-CN" sz="1800"/>
-                        <a:t>99.73%</a:t>
+                        <a:t>98.65%</a:t>
                       </a:r>
                       <a:endParaRPr lang="en-US" altLang="zh-CN" sz="1800"/>
                     </a:p>
@@ -8890,7 +8779,7 @@
                       <a:pPr algn="ctr"/>
                       <a:r>
                         <a:rPr lang="en-US" altLang="zh-CN" sz="1800"/>
-                        <a:t>99.89%</a:t>
+                        <a:t>91.7%</a:t>
                       </a:r>
                       <a:endParaRPr lang="en-US" altLang="zh-CN" sz="1800"/>
                     </a:p>
@@ -8904,7 +8793,7 @@
                       <a:pPr algn="ctr"/>
                       <a:r>
                         <a:rPr lang="en-US" altLang="zh-CN" sz="1800"/>
-                        <a:t>100.00%</a:t>
+                        <a:t>89.9%</a:t>
                       </a:r>
                       <a:endParaRPr lang="en-US" altLang="zh-CN" sz="1800"/>
                     </a:p>
@@ -8934,7 +8823,7 @@
                       <a:pPr algn="ctr"/>
                       <a:r>
                         <a:rPr lang="en-US" altLang="zh-CN" sz="1800"/>
-                        <a:t>100.00%</a:t>
+                        <a:t>99.8%</a:t>
                       </a:r>
                       <a:endParaRPr lang="en-US" altLang="zh-CN" sz="1800"/>
                     </a:p>
@@ -8950,7 +8839,7 @@
                       </a:pPr>
                       <a:r>
                         <a:rPr lang="en-US" altLang="en-US" sz="1800"/>
-                        <a:t>97.36%</a:t>
+                        <a:t>97.8%</a:t>
                       </a:r>
                       <a:endParaRPr lang="en-US" altLang="en-US" sz="1800"/>
                     </a:p>
@@ -8982,7 +8871,7 @@
                       </a:pPr>
                       <a:r>
                         <a:rPr lang="en-US" altLang="en-US" sz="1800"/>
-                        <a:t>99.95%</a:t>
+                        <a:t>95.5%</a:t>
                       </a:r>
                       <a:endParaRPr lang="en-US" altLang="en-US" sz="1800"/>
                     </a:p>
@@ -8998,7 +8887,7 @@
                       </a:pPr>
                       <a:r>
                         <a:rPr lang="en-US" altLang="en-US" sz="1800"/>
-                        <a:t>98.67%</a:t>
+                        <a:t>93.7%</a:t>
                       </a:r>
                       <a:endParaRPr lang="en-US" altLang="en-US" sz="1800"/>
                     </a:p>
@@ -9047,7 +8936,7 @@
             </a:pPr>
             <a:r>
               <a:rPr lang="en-US" altLang="en-US"/>
-              <a:t>Accuracy: 99.73% → Almost all test transactions were classified correctly.</a:t>
+              <a:t>Accuracy: 98.65% → Almost all test transactions were classified correctly.</a:t>
             </a:r>
             <a:endParaRPr lang="en-US" altLang="en-US"/>
           </a:p>
@@ -9058,7 +8947,7 @@
             </a:pPr>
             <a:r>
               <a:rPr lang="en-US" altLang="en-US"/>
-              <a:t>Precision: 100% → Every transaction predicted as fraud was actually fraud in this test set.</a:t>
+              <a:t>Precision: 89.9% → The model raised about 25 false alarms among 2,001 normal transactions.</a:t>
             </a:r>
             <a:endParaRPr lang="en-US" altLang="en-US"/>
           </a:p>
@@ -9069,7 +8958,7 @@
             </a:pPr>
             <a:r>
               <a:rPr lang="en-US" altLang="en-US"/>
-              <a:t>Recall: 97.36% → The model detected about 97 out of every 100 actual fraud transactions.</a:t>
+              <a:t>Recall: 97.8% → The model detected about 97 out of every 100 actual fraud transactions.</a:t>
             </a:r>
             <a:endParaRPr lang="en-US" altLang="en-US"/>
           </a:p>
@@ -9080,7 +8969,7 @@
             </a:pPr>
             <a:r>
               <a:rPr lang="en-US" altLang="en-US"/>
-              <a:t>F1 Score: 98.67% → Shows a strong balance between precision and recall.</a:t>
+              <a:t>F1 Score: 93.7% → Shows a strong balance between precision and recall.</a:t>
             </a:r>
             <a:endParaRPr lang="en-US" altLang="en-US"/>
           </a:p>
@@ -9098,7 +8987,7 @@
             </a:pPr>
             <a:r>
               <a:rPr lang="en-US" altLang="en-US"/>
-              <a:t>The Random Forest model showed strong performance on the test set, particularly in detecting fraudulent transactions, with 97.36% recall and 98.67% F1-score.</a:t>
+              <a:t>The Random Forest model showed strong performance on the test set, particularly in detecting fraudulent transactions, with 97.8% recall and 93.7% F1-score.</a:t>
             </a:r>
             <a:endParaRPr lang="en-US" altLang="en-US"/>
           </a:p>
@@ -9855,7 +9744,7 @@
                 <a:ea typeface="Calibri" panose="020F0502020204030204" pitchFamily="34" charset="-122"/>
                 <a:cs typeface="Calibri" panose="020F0502020204030204" pitchFamily="34" charset="-120"/>
               </a:rPr>
-              <a:t>Random Forest &amp; XGBoost tie at 0.96–0.97 recall</a:t>
+              <a:t>Random Forest &amp; XGBoost all most same at 0.96–0.97 recall</a:t>
             </a:r>
             <a:endParaRPr lang="en-US" sz="1100" dirty="0"/>
           </a:p>
@@ -10119,7 +10008,7 @@
                 <a:ea typeface="Calibri" panose="020F0502020204030204" pitchFamily="34" charset="-122"/>
                 <a:cs typeface="Calibri" panose="020F0502020204030204" pitchFamily="34" charset="-120"/>
               </a:rPr>
-              <a:t>No overfitting — train/test accuracy gap is only ~0.3%</a:t>
+              <a:t>No overfitting </a:t>
             </a:r>
             <a:endParaRPr lang="en-US" sz="1100" dirty="0"/>
           </a:p>
@@ -10198,47 +10087,9 @@
                 <a:ea typeface="Calibri" panose="020F0502020204030204" pitchFamily="34" charset="-122"/>
                 <a:cs typeface="Calibri" panose="020F0502020204030204" pitchFamily="34" charset="-120"/>
               </a:rPr>
-              <a:t>No leakage — recall held after removing risky features</a:t>
+              <a:t> leakage found and removed risky features</a:t>
             </a:r>
             <a:endParaRPr lang="en-US" sz="1100" dirty="0"/>
-          </a:p>
-        </p:txBody>
-      </p:sp>
-      <p:sp>
-        <p:nvSpPr>
-          <p:cNvPr id="32" name="Text 30"/>
-          <p:cNvSpPr/>
-          <p:nvPr/>
-        </p:nvSpPr>
-        <p:spPr>
-          <a:xfrm>
-            <a:off x="822960" y="5605272"/>
-            <a:ext cx="228600" cy="457200"/>
-          </a:xfrm>
-          <a:prstGeom prst="rect">
-            <a:avLst/>
-          </a:prstGeom>
-          <a:noFill/>
-        </p:spPr>
-        <p:txBody>
-          <a:bodyPr wrap="square" lIns="0" tIns="0" rIns="0" bIns="0" rtlCol="0" anchor="ctr"/>
-          <a:lstStyle/>
-          <a:p>
-            <a:pPr marL="0" indent="0">
-              <a:buNone/>
-            </a:pPr>
-            <a:r>
-              <a:rPr lang="en-US" sz="1300" b="1" dirty="0">
-                <a:solidFill>
-                  <a:srgbClr val="1E8E5A"/>
-                </a:solidFill>
-                <a:latin typeface="Arial" panose="020B0604020202020204" pitchFamily="34" charset="0"/>
-                <a:ea typeface="Arial" panose="020B0604020202020204" pitchFamily="34" charset="-122"/>
-                <a:cs typeface="Arial" panose="020B0604020202020204" pitchFamily="34" charset="-120"/>
-              </a:rPr>
-              <a:t>•</a:t>
-            </a:r>
-            <a:endParaRPr lang="en-US" sz="1300" dirty="0"/>
           </a:p>
         </p:txBody>
       </p:sp>
@@ -10268,17 +10119,6 @@
               </a:lnSpc>
               <a:buNone/>
             </a:pPr>
-            <a:r>
-              <a:rPr lang="en-US" sz="1100" dirty="0">
-                <a:solidFill>
-                  <a:srgbClr val="1B1F3B"/>
-                </a:solidFill>
-                <a:latin typeface="Calibri" panose="020F0502020204030204" pitchFamily="34" charset="0"/>
-                <a:ea typeface="Calibri" panose="020F0502020204030204" pitchFamily="34" charset="-122"/>
-                <a:cs typeface="Calibri" panose="020F0502020204030204" pitchFamily="34" charset="-120"/>
-              </a:rPr>
-              <a:t>SMOTE confirmed imbalance wasn't inflating scores</a:t>
-            </a:r>
             <a:endParaRPr lang="en-US" sz="1100" dirty="0"/>
           </a:p>
         </p:txBody>
@@ -10556,7 +10396,7 @@
                 <a:ea typeface="Calibri" panose="020F0502020204030204" pitchFamily="34" charset="-122"/>
                 <a:cs typeface="Calibri" panose="020F0502020204030204" pitchFamily="34" charset="-120"/>
               </a:rPr>
-              <a:t>0 false alarms; only 7 of 228 frauds missed in testing</a:t>
+              <a:t>25 false alarms; only 4 of 228 frauds missed in testing</a:t>
             </a:r>
             <a:endParaRPr lang="en-US" sz="1100" dirty="0"/>
           </a:p>
@@ -12214,9 +12054,50 @@
         <p:nvPr/>
       </p:nvGrpSpPr>
       <p:grpSpPr/>
+      <p:sp>
+        <p:nvSpPr>
+          <p:cNvPr id="3" name="Text Box 2"/>
+          <p:cNvSpPr txBox="1"/>
+          <p:nvPr/>
+        </p:nvSpPr>
+        <p:spPr>
+          <a:xfrm>
+            <a:off x="337185" y="248285"/>
+            <a:ext cx="7688580" cy="694690"/>
+          </a:xfrm>
+          <a:prstGeom prst="rect">
+            <a:avLst/>
+          </a:prstGeom>
+          <a:noFill/>
+        </p:spPr>
+        <p:txBody>
+          <a:bodyPr wrap="square" rtlCol="0">
+            <a:noAutofit/>
+          </a:bodyPr>
+          <a:p>
+            <a:r>
+              <a:rPr lang="en-US" sz="3600" b="1">
+                <a:solidFill>
+                  <a:schemeClr val="tx2">
+                    <a:lumMod val="75000"/>
+                  </a:schemeClr>
+                </a:solidFill>
+              </a:rPr>
+              <a:t>STREAMLIT APPLICATION</a:t>
+            </a:r>
+            <a:endParaRPr lang="en-US" sz="3600" b="1">
+              <a:solidFill>
+                <a:schemeClr val="tx2">
+                  <a:lumMod val="75000"/>
+                </a:schemeClr>
+              </a:solidFill>
+            </a:endParaRPr>
+          </a:p>
+        </p:txBody>
+      </p:sp>
       <p:pic>
         <p:nvPicPr>
-          <p:cNvPr id="2" name="Picture 1" descr="Screenshot 2026-09-17 215623"/>
+          <p:cNvPr id="4" name="Picture 3" descr="Screenshot 2026-09-28 194749"/>
           <p:cNvPicPr>
             <a:picLocks noChangeAspect="1"/>
           </p:cNvPicPr>
@@ -12230,55 +12111,14 @@
         </p:blipFill>
         <p:spPr>
           <a:xfrm>
-            <a:off x="2571750" y="689610"/>
-            <a:ext cx="8536305" cy="5860415"/>
+            <a:off x="1809750" y="942975"/>
+            <a:ext cx="8201660" cy="5568950"/>
           </a:xfrm>
           <a:prstGeom prst="rect">
             <a:avLst/>
           </a:prstGeom>
         </p:spPr>
       </p:pic>
-      <p:sp>
-        <p:nvSpPr>
-          <p:cNvPr id="3" name="Text Box 2"/>
-          <p:cNvSpPr txBox="1"/>
-          <p:nvPr/>
-        </p:nvSpPr>
-        <p:spPr>
-          <a:xfrm>
-            <a:off x="337185" y="248285"/>
-            <a:ext cx="7688580" cy="694690"/>
-          </a:xfrm>
-          <a:prstGeom prst="rect">
-            <a:avLst/>
-          </a:prstGeom>
-          <a:noFill/>
-        </p:spPr>
-        <p:txBody>
-          <a:bodyPr wrap="square" rtlCol="0">
-            <a:noAutofit/>
-          </a:bodyPr>
-          <a:p>
-            <a:r>
-              <a:rPr lang="en-US" sz="3600" b="1">
-                <a:solidFill>
-                  <a:schemeClr val="tx2">
-                    <a:lumMod val="75000"/>
-                  </a:schemeClr>
-                </a:solidFill>
-              </a:rPr>
-              <a:t>STREAMLIT APPLICATION</a:t>
-            </a:r>
-            <a:endParaRPr lang="en-US" sz="3600" b="1">
-              <a:solidFill>
-                <a:schemeClr val="tx2">
-                  <a:lumMod val="75000"/>
-                </a:schemeClr>
-              </a:solidFill>
-            </a:endParaRPr>
-          </a:p>
-        </p:txBody>
-      </p:sp>
     </p:spTree>
   </p:cSld>
   <p:clrMapOvr>
@@ -16365,7 +16205,7 @@
         </p:nvSpPr>
         <p:spPr>
           <a:xfrm>
-            <a:off x="548640" y="411480"/>
+            <a:off x="548640" y="431800"/>
             <a:ext cx="9144000" cy="640080"/>
           </a:xfrm>
           <a:prstGeom prst="rect">
@@ -16698,7 +16538,7 @@
                 <a:ea typeface="Calibri" panose="020F0502020204030204" pitchFamily="34" charset="-122"/>
                 <a:cs typeface="Calibri" panose="020F0502020204030204" pitchFamily="34" charset="-120"/>
               </a:rPr>
-              <a:t>TRANSFER carries the highest fraud concentration at roughly 1 in 2 transactions</a:t>
+              <a:t>TRANSFER carries the highest fraud concentration at roughly 4 in 10 transactions</a:t>
             </a:r>
             <a:endParaRPr lang="en-US" sz="1150" dirty="0"/>
           </a:p>
@@ -17289,7 +17129,7 @@
         </p:nvSpPr>
         <p:spPr>
           <a:xfrm>
-            <a:off x="8138160" y="1828800"/>
+            <a:off x="8138160" y="1849120"/>
             <a:ext cx="3520440" cy="4114800"/>
           </a:xfrm>
           <a:prstGeom prst="roundRect">
@@ -17441,7 +17281,7 @@
                 <a:ea typeface="Calibri" panose="020F0502020204030204" pitchFamily="34" charset="-122"/>
                 <a:cs typeface="Calibri" panose="020F0502020204030204" pitchFamily="34" charset="-120"/>
               </a:rPr>
-              <a:t>Gradient-boosted trees. Handles class imbalance with scale_pos_weight and often leads on complex tabular data.</a:t>
+              <a:t>Gradient-boosted trees. Handles class imbalance  and often leads on complex tabular data.</a:t>
             </a:r>
             <a:endParaRPr lang="en-US" sz="1200" dirty="0"/>
           </a:p>
